--- a/yocto_training_all_session_decks/session_decks/D2S5_Build_Debugging.pptx
+++ b/yocto_training_all_session_decks/session_decks/D2S5_Build_Debugging.pptx
@@ -5,26 +5,26 @@
     <p:sldMasterId id="2147483648" r:id="rId1"/>
   </p:sldMasterIdLst>
   <p:notesMasterIdLst>
-    <p:notesMasterId r:id="rId8"/>
+    <p:notesMasterId r:id="rId11"/>
   </p:notesMasterIdLst>
   <p:handoutMasterIdLst>
-    <p:handoutMasterId r:id="rId9"/>
+    <p:handoutMasterId r:id="rId12"/>
   </p:handoutMasterIdLst>
   <p:sldIdLst>
-    <p:sldId id="1007" r:id="rId18"/>
-    <p:sldId id="1008" r:id="rId19"/>
-    <p:sldId id="1009" r:id="rId20"/>
-    <p:sldId id="1010" r:id="rId21"/>
-    <p:sldId id="1011" r:id="rId22"/>
-    <p:sldId id="1012" r:id="rId23"/>
-    <p:sldId id="1013" r:id="rId24"/>
-    <p:sldId id="1014" r:id="rId25"/>
-    <p:sldId id="1015" r:id="rId26"/>
+    <p:sldId id="1007" r:id="rId2"/>
+    <p:sldId id="1008" r:id="rId3"/>
+    <p:sldId id="1009" r:id="rId4"/>
+    <p:sldId id="1010" r:id="rId5"/>
+    <p:sldId id="1011" r:id="rId6"/>
+    <p:sldId id="1012" r:id="rId7"/>
+    <p:sldId id="1013" r:id="rId8"/>
+    <p:sldId id="1014" r:id="rId9"/>
+    <p:sldId id="1015" r:id="rId10"/>
   </p:sldIdLst>
   <p:sldSz cx="12192000" cy="6858000"/>
   <p:notesSz cx="6858000" cy="9144000"/>
   <p:custDataLst>
-    <p:tags r:id="rId10"/>
+    <p:tags r:id="rId13"/>
   </p:custDataLst>
   <p:defaultTextStyle>
     <a:defPPr>
@@ -2930,7 +2930,7 @@
           <a:p>
             <a:fld id="{0CEC647C-F50C-4F78-AA33-D7AA6CDA18EE}" type="datetimeFigureOut">
               <a:rPr lang="en-US" smtClean="0"/>
-              <a:t>7/13/2025</a:t>
+              <a:t>6/10/2026</a:t>
             </a:fld>
             <a:endParaRPr lang="en-US"/>
           </a:p>
@@ -3095,7 +3095,7 @@
           <a:p>
             <a:fld id="{3A83341F-E62C-483B-84B4-966F8BE46097}" type="datetimeFigureOut">
               <a:rPr lang="en-US" smtClean="0"/>
-              <a:t>7/13/2025</a:t>
+              <a:t>6/10/2026</a:t>
             </a:fld>
             <a:endParaRPr lang="en-US"/>
           </a:p>
@@ -5179,8 +5179,8 @@
 </p:sldMaster>
 </file>
 
-<file path=ppt/slides/slide10.xml><?xml version="1.0" encoding="utf-8"?>
-<p:sld xmlns:a="http://schemas.openxmlformats.org/drawingml/2006/main" xmlns:p="http://schemas.openxmlformats.org/presentationml/2006/main" xmlns:r="http://schemas.openxmlformats.org/officeDocument/2006/relationships">
+<file path=ppt/slides/slide1.xml><?xml version="1.0" encoding="utf-8"?>
+<p:sld xmlns:a="http://schemas.openxmlformats.org/drawingml/2006/main" xmlns:r="http://schemas.openxmlformats.org/officeDocument/2006/relationships" xmlns:p="http://schemas.openxmlformats.org/presentationml/2006/main">
   <p:cSld>
     <p:spTree>
       <p:nvGrpSpPr>
@@ -5188,7 +5188,93 @@
         <p:cNvGrpSpPr/>
         <p:nvPr/>
       </p:nvGrpSpPr>
-      <p:grpSpPr/>
+      <p:grpSpPr>
+        <a:xfrm>
+          <a:off x="0" y="0"/>
+          <a:ext cx="0" cy="0"/>
+          <a:chOff x="0" y="0"/>
+          <a:chExt cx="0" cy="0"/>
+        </a:xfrm>
+      </p:grpSpPr>
+      <p:sp>
+        <p:nvSpPr>
+          <p:cNvPr id="2" name="Title 1"/>
+          <p:cNvSpPr>
+            <a:spLocks noGrp="1"/>
+          </p:cNvSpPr>
+          <p:nvPr>
+            <p:ph type="ctrTitle"/>
+          </p:nvPr>
+        </p:nvSpPr>
+        <p:spPr/>
+        <p:txBody>
+          <a:bodyPr/>
+          <a:lstStyle/>
+          <a:p>
+            <a:r>
+              <a:rPr sz="4400" b="1">
+                <a:solidFill>
+                  <a:srgbClr val="FFFFFF"/>
+                </a:solidFill>
+                <a:latin typeface="Calibri"/>
+              </a:rPr>
+              <a:t>Build Debugging</a:t>
+            </a:r>
+          </a:p>
+        </p:txBody>
+      </p:sp>
+      <p:sp>
+        <p:nvSpPr>
+          <p:cNvPr id="3" name="Subtitle 2"/>
+          <p:cNvSpPr>
+            <a:spLocks noGrp="1"/>
+          </p:cNvSpPr>
+          <p:nvPr>
+            <p:ph type="subTitle" idx="1"/>
+          </p:nvPr>
+        </p:nvSpPr>
+        <p:spPr/>
+        <p:txBody>
+          <a:bodyPr/>
+          <a:lstStyle/>
+          <a:p>
+            <a:r>
+              <a:rPr sz="1800" dirty="0">
+                <a:solidFill>
+                  <a:srgbClr val="FFFFFF"/>
+                </a:solidFill>
+                <a:latin typeface="Calibri"/>
+              </a:rPr>
+              <a:t>Diagnosing failures fast</a:t>
+            </a:r>
+          </a:p>
+        </p:txBody>
+      </p:sp>
+    </p:spTree>
+  </p:cSld>
+  <p:clrMapOvr>
+    <a:masterClrMapping/>
+  </p:clrMapOvr>
+</p:sld>
+</file>
+
+<file path=ppt/slides/slide2.xml><?xml version="1.0" encoding="utf-8"?>
+<p:sld xmlns:a="http://schemas.openxmlformats.org/drawingml/2006/main" xmlns:r="http://schemas.openxmlformats.org/officeDocument/2006/relationships" xmlns:p="http://schemas.openxmlformats.org/presentationml/2006/main">
+  <p:cSld>
+    <p:spTree>
+      <p:nvGrpSpPr>
+        <p:cNvPr id="1" name=""/>
+        <p:cNvGrpSpPr/>
+        <p:nvPr/>
+      </p:nvGrpSpPr>
+      <p:grpSpPr>
+        <a:xfrm>
+          <a:off x="0" y="0"/>
+          <a:ext cx="0" cy="0"/>
+          <a:chOff x="0" y="0"/>
+          <a:chExt cx="0" cy="0"/>
+        </a:xfrm>
+      </p:grpSpPr>
       <p:sp>
         <p:nvSpPr>
           <p:cNvPr id="2" name="Title 1"/>
@@ -5205,13 +5291,178 @@
           <a:lstStyle/>
           <a:p>
             <a:r>
-              <a:rPr sz="3200" b="1">
-                <a:solidFill>
-                  <a:srgbClr val="CC0066"/>
-                </a:solidFill>
+              <a:rPr sz="3200" b="1" dirty="0">
                 <a:latin typeface="Calibri"/>
               </a:rPr>
-              <a:t>Reading Task Logs</a:t>
+              <a:t>Session Agenda</a:t>
+            </a:r>
+          </a:p>
+        </p:txBody>
+      </p:sp>
+      <p:sp>
+        <p:nvSpPr>
+          <p:cNvPr id="3" name="TextBox 2"/>
+          <p:cNvSpPr txBox="1"/>
+          <p:nvPr/>
+        </p:nvSpPr>
+        <p:spPr>
+          <a:xfrm>
+            <a:off x="822960" y="1463040"/>
+            <a:ext cx="10515600" cy="5029200"/>
+          </a:xfrm>
+          <a:prstGeom prst="rect">
+            <a:avLst/>
+          </a:prstGeom>
+          <a:noFill/>
+        </p:spPr>
+        <p:txBody>
+          <a:bodyPr wrap="square" lIns="45720" rIns="45720">
+            <a:spAutoFit/>
+          </a:bodyPr>
+          <a:lstStyle/>
+          <a:p>
+            <a:pPr>
+              <a:spcAft>
+                <a:spcPts val="600"/>
+              </a:spcAft>
+            </a:pPr>
+            <a:r>
+              <a:rPr sz="2000" b="0" i="0">
+                <a:solidFill>
+                  <a:srgbClr val="333333"/>
+                </a:solidFill>
+                <a:latin typeface="Calibri"/>
+              </a:rPr>
+              <a:t>1.  The five places builds fail</a:t>
+            </a:r>
+          </a:p>
+          <a:p>
+            <a:pPr>
+              <a:spcAft>
+                <a:spcPts val="600"/>
+              </a:spcAft>
+            </a:pPr>
+            <a:r>
+              <a:rPr sz="2000" b="0" i="0">
+                <a:solidFill>
+                  <a:srgbClr val="333333"/>
+                </a:solidFill>
+                <a:latin typeface="Calibri"/>
+              </a:rPr>
+              <a:t>2.  Reading task logs</a:t>
+            </a:r>
+          </a:p>
+          <a:p>
+            <a:pPr>
+              <a:spcAft>
+                <a:spcPts val="600"/>
+              </a:spcAft>
+            </a:pPr>
+            <a:r>
+              <a:rPr sz="2000" b="0" i="0">
+                <a:solidFill>
+                  <a:srgbClr val="333333"/>
+                </a:solidFill>
+                <a:latin typeface="Calibri"/>
+              </a:rPr>
+              <a:t>3.  Reproducing a single task</a:t>
+            </a:r>
+          </a:p>
+          <a:p>
+            <a:pPr>
+              <a:spcAft>
+                <a:spcPts val="600"/>
+              </a:spcAft>
+            </a:pPr>
+            <a:r>
+              <a:rPr sz="2000" b="0" i="0">
+                <a:solidFill>
+                  <a:srgbClr val="333333"/>
+                </a:solidFill>
+                <a:latin typeface="Calibri"/>
+              </a:rPr>
+              <a:t>4.  Inspecting WORKDIR</a:t>
+            </a:r>
+          </a:p>
+          <a:p>
+            <a:pPr>
+              <a:spcAft>
+                <a:spcPts val="600"/>
+              </a:spcAft>
+            </a:pPr>
+            <a:r>
+              <a:rPr sz="2000" b="0" i="0">
+                <a:solidFill>
+                  <a:srgbClr val="333333"/>
+                </a:solidFill>
+                <a:latin typeface="Calibri"/>
+              </a:rPr>
+              <a:t>5.  Patch workflows that don't break on rebase</a:t>
+            </a:r>
+          </a:p>
+          <a:p>
+            <a:pPr>
+              <a:spcAft>
+                <a:spcPts val="600"/>
+              </a:spcAft>
+            </a:pPr>
+            <a:r>
+              <a:rPr sz="2000" b="0" i="0">
+                <a:solidFill>
+                  <a:srgbClr val="333333"/>
+                </a:solidFill>
+                <a:latin typeface="Calibri"/>
+              </a:rPr>
+              <a:t>6.  When to clean and when to retry</a:t>
+            </a:r>
+          </a:p>
+        </p:txBody>
+      </p:sp>
+    </p:spTree>
+  </p:cSld>
+  <p:clrMapOvr>
+    <a:masterClrMapping/>
+  </p:clrMapOvr>
+</p:sld>
+</file>
+
+<file path=ppt/slides/slide3.xml><?xml version="1.0" encoding="utf-8"?>
+<p:sld xmlns:a="http://schemas.openxmlformats.org/drawingml/2006/main" xmlns:r="http://schemas.openxmlformats.org/officeDocument/2006/relationships" xmlns:p="http://schemas.openxmlformats.org/presentationml/2006/main">
+  <p:cSld>
+    <p:spTree>
+      <p:nvGrpSpPr>
+        <p:cNvPr id="1" name=""/>
+        <p:cNvGrpSpPr/>
+        <p:nvPr/>
+      </p:nvGrpSpPr>
+      <p:grpSpPr>
+        <a:xfrm>
+          <a:off x="0" y="0"/>
+          <a:ext cx="0" cy="0"/>
+          <a:chOff x="0" y="0"/>
+          <a:chExt cx="0" cy="0"/>
+        </a:xfrm>
+      </p:grpSpPr>
+      <p:sp>
+        <p:nvSpPr>
+          <p:cNvPr id="2" name="Title 1"/>
+          <p:cNvSpPr>
+            <a:spLocks noGrp="1"/>
+          </p:cNvSpPr>
+          <p:nvPr>
+            <p:ph type="title"/>
+          </p:nvPr>
+        </p:nvSpPr>
+        <p:spPr/>
+        <p:txBody>
+          <a:bodyPr/>
+          <a:lstStyle/>
+          <a:p>
+            <a:r>
+              <a:rPr sz="3200" b="1" dirty="0">
+                <a:latin typeface="Calibri"/>
+              </a:rPr>
+              <a:t>Where Builds Fail</a:t>
             </a:r>
           </a:p>
         </p:txBody>
@@ -5233,7 +5484,660 @@
           <a:noFill/>
         </p:spPr>
         <p:txBody>
-          <a:bodyPr wrap="square" anchor="t" lIns="45720" rIns="45720">
+          <a:bodyPr wrap="square" lIns="45720" rIns="45720" anchor="t">
+            <a:spAutoFit/>
+          </a:bodyPr>
+          <a:lstStyle/>
+          <a:p>
+            <a:pPr algn="l"/>
+            <a:r>
+              <a:rPr sz="1500" b="0" i="1">
+                <a:solidFill>
+                  <a:srgbClr val="666666"/>
+                </a:solidFill>
+                <a:latin typeface="Calibri"/>
+              </a:rPr>
+              <a:t>Five places, in roughly increasing complexity.</a:t>
+            </a:r>
+          </a:p>
+        </p:txBody>
+      </p:sp>
+      <p:sp>
+        <p:nvSpPr>
+          <p:cNvPr id="4" name="Rounded Rectangle 3"/>
+          <p:cNvSpPr/>
+          <p:nvPr/>
+        </p:nvSpPr>
+        <p:spPr>
+          <a:xfrm>
+            <a:off x="379476" y="2103120"/>
+            <a:ext cx="2249424" cy="640080"/>
+          </a:xfrm>
+          <a:prstGeom prst="roundRect">
+            <a:avLst/>
+          </a:prstGeom>
+          <a:solidFill>
+            <a:srgbClr val="FCE4EC"/>
+          </a:solidFill>
+          <a:ln w="6350">
+            <a:solidFill>
+              <a:srgbClr val="CC0066"/>
+            </a:solidFill>
+          </a:ln>
+          <a:effectLst/>
+        </p:spPr>
+        <p:style>
+          <a:lnRef idx="1">
+            <a:schemeClr val="accent1"/>
+          </a:lnRef>
+          <a:fillRef idx="3">
+            <a:schemeClr val="accent1"/>
+          </a:fillRef>
+          <a:effectRef idx="2">
+            <a:schemeClr val="accent1"/>
+          </a:effectRef>
+          <a:fontRef idx="minor">
+            <a:schemeClr val="lt1"/>
+          </a:fontRef>
+        </p:style>
+        <p:txBody>
+          <a:bodyPr lIns="18288" rIns="18288" rtlCol="0" anchor="ctr"/>
+          <a:lstStyle/>
+          <a:p>
+            <a:pPr algn="ctr"/>
+            <a:r>
+              <a:rPr sz="1100" b="1">
+                <a:solidFill>
+                  <a:srgbClr val="663399"/>
+                </a:solidFill>
+                <a:latin typeface="Consolas"/>
+              </a:rPr>
+              <a:t>Fetch</a:t>
+            </a:r>
+          </a:p>
+        </p:txBody>
+      </p:sp>
+      <p:sp>
+        <p:nvSpPr>
+          <p:cNvPr id="5" name="TextBox 4"/>
+          <p:cNvSpPr txBox="1"/>
+          <p:nvPr/>
+        </p:nvSpPr>
+        <p:spPr>
+          <a:xfrm>
+            <a:off x="379476" y="2788920"/>
+            <a:ext cx="2249424" cy="320040"/>
+          </a:xfrm>
+          <a:prstGeom prst="rect">
+            <a:avLst/>
+          </a:prstGeom>
+          <a:noFill/>
+        </p:spPr>
+        <p:txBody>
+          <a:bodyPr wrap="square" lIns="45720" rIns="45720" anchor="t">
+            <a:spAutoFit/>
+          </a:bodyPr>
+          <a:lstStyle/>
+          <a:p>
+            <a:pPr algn="ctr"/>
+            <a:r>
+              <a:rPr sz="900" b="0" i="0">
+                <a:solidFill>
+                  <a:srgbClr val="666666"/>
+                </a:solidFill>
+                <a:latin typeface="Calibri"/>
+              </a:rPr>
+              <a:t>Source download</a:t>
+            </a:r>
+          </a:p>
+        </p:txBody>
+      </p:sp>
+      <p:sp>
+        <p:nvSpPr>
+          <p:cNvPr id="6" name="Rounded Rectangle 5"/>
+          <p:cNvSpPr/>
+          <p:nvPr/>
+        </p:nvSpPr>
+        <p:spPr>
+          <a:xfrm>
+            <a:off x="2674620" y="2103120"/>
+            <a:ext cx="2249424" cy="640080"/>
+          </a:xfrm>
+          <a:prstGeom prst="roundRect">
+            <a:avLst/>
+          </a:prstGeom>
+          <a:solidFill>
+            <a:srgbClr val="FCE4EC"/>
+          </a:solidFill>
+          <a:ln w="6350">
+            <a:solidFill>
+              <a:srgbClr val="CC0066"/>
+            </a:solidFill>
+          </a:ln>
+          <a:effectLst/>
+        </p:spPr>
+        <p:style>
+          <a:lnRef idx="1">
+            <a:schemeClr val="accent1"/>
+          </a:lnRef>
+          <a:fillRef idx="3">
+            <a:schemeClr val="accent1"/>
+          </a:fillRef>
+          <a:effectRef idx="2">
+            <a:schemeClr val="accent1"/>
+          </a:effectRef>
+          <a:fontRef idx="minor">
+            <a:schemeClr val="lt1"/>
+          </a:fontRef>
+        </p:style>
+        <p:txBody>
+          <a:bodyPr lIns="18288" rIns="18288" rtlCol="0" anchor="ctr"/>
+          <a:lstStyle/>
+          <a:p>
+            <a:pPr algn="ctr"/>
+            <a:r>
+              <a:rPr sz="1100" b="1">
+                <a:solidFill>
+                  <a:srgbClr val="663399"/>
+                </a:solidFill>
+                <a:latin typeface="Consolas"/>
+              </a:rPr>
+              <a:t>Patch</a:t>
+            </a:r>
+          </a:p>
+        </p:txBody>
+      </p:sp>
+      <p:sp>
+        <p:nvSpPr>
+          <p:cNvPr id="7" name="TextBox 6"/>
+          <p:cNvSpPr txBox="1"/>
+          <p:nvPr/>
+        </p:nvSpPr>
+        <p:spPr>
+          <a:xfrm>
+            <a:off x="2674620" y="2788920"/>
+            <a:ext cx="2249424" cy="320040"/>
+          </a:xfrm>
+          <a:prstGeom prst="rect">
+            <a:avLst/>
+          </a:prstGeom>
+          <a:noFill/>
+        </p:spPr>
+        <p:txBody>
+          <a:bodyPr wrap="square" lIns="45720" rIns="45720" anchor="t">
+            <a:spAutoFit/>
+          </a:bodyPr>
+          <a:lstStyle/>
+          <a:p>
+            <a:pPr algn="ctr"/>
+            <a:r>
+              <a:rPr sz="900" b="0" i="0">
+                <a:solidFill>
+                  <a:srgbClr val="666666"/>
+                </a:solidFill>
+                <a:latin typeface="Calibri"/>
+              </a:rPr>
+              <a:t>Apply patches</a:t>
+            </a:r>
+          </a:p>
+        </p:txBody>
+      </p:sp>
+      <p:sp>
+        <p:nvSpPr>
+          <p:cNvPr id="8" name="Rounded Rectangle 7"/>
+          <p:cNvSpPr/>
+          <p:nvPr/>
+        </p:nvSpPr>
+        <p:spPr>
+          <a:xfrm>
+            <a:off x="4969764" y="2103120"/>
+            <a:ext cx="2249424" cy="640080"/>
+          </a:xfrm>
+          <a:prstGeom prst="roundRect">
+            <a:avLst/>
+          </a:prstGeom>
+          <a:solidFill>
+            <a:srgbClr val="E9D8F0"/>
+          </a:solidFill>
+          <a:ln w="6350">
+            <a:solidFill>
+              <a:srgbClr val="CC0066"/>
+            </a:solidFill>
+          </a:ln>
+          <a:effectLst/>
+        </p:spPr>
+        <p:style>
+          <a:lnRef idx="1">
+            <a:schemeClr val="accent1"/>
+          </a:lnRef>
+          <a:fillRef idx="3">
+            <a:schemeClr val="accent1"/>
+          </a:fillRef>
+          <a:effectRef idx="2">
+            <a:schemeClr val="accent1"/>
+          </a:effectRef>
+          <a:fontRef idx="minor">
+            <a:schemeClr val="lt1"/>
+          </a:fontRef>
+        </p:style>
+        <p:txBody>
+          <a:bodyPr lIns="18288" rIns="18288" rtlCol="0" anchor="ctr"/>
+          <a:lstStyle/>
+          <a:p>
+            <a:pPr algn="ctr"/>
+            <a:r>
+              <a:rPr sz="1100" b="1">
+                <a:solidFill>
+                  <a:srgbClr val="663399"/>
+                </a:solidFill>
+                <a:latin typeface="Consolas"/>
+              </a:rPr>
+              <a:t>Configure</a:t>
+            </a:r>
+          </a:p>
+        </p:txBody>
+      </p:sp>
+      <p:sp>
+        <p:nvSpPr>
+          <p:cNvPr id="9" name="TextBox 8"/>
+          <p:cNvSpPr txBox="1"/>
+          <p:nvPr/>
+        </p:nvSpPr>
+        <p:spPr>
+          <a:xfrm>
+            <a:off x="4969764" y="2788920"/>
+            <a:ext cx="2249424" cy="320040"/>
+          </a:xfrm>
+          <a:prstGeom prst="rect">
+            <a:avLst/>
+          </a:prstGeom>
+          <a:noFill/>
+        </p:spPr>
+        <p:txBody>
+          <a:bodyPr wrap="square" lIns="45720" rIns="45720" anchor="t">
+            <a:spAutoFit/>
+          </a:bodyPr>
+          <a:lstStyle/>
+          <a:p>
+            <a:pPr algn="ctr"/>
+            <a:r>
+              <a:rPr sz="900" b="0" i="0">
+                <a:solidFill>
+                  <a:srgbClr val="666666"/>
+                </a:solidFill>
+                <a:latin typeface="Calibri"/>
+              </a:rPr>
+              <a:t>autotools/cmake</a:t>
+            </a:r>
+          </a:p>
+        </p:txBody>
+      </p:sp>
+      <p:sp>
+        <p:nvSpPr>
+          <p:cNvPr id="10" name="Rounded Rectangle 9"/>
+          <p:cNvSpPr/>
+          <p:nvPr/>
+        </p:nvSpPr>
+        <p:spPr>
+          <a:xfrm>
+            <a:off x="7264907" y="2103120"/>
+            <a:ext cx="2249424" cy="640080"/>
+          </a:xfrm>
+          <a:prstGeom prst="roundRect">
+            <a:avLst/>
+          </a:prstGeom>
+          <a:solidFill>
+            <a:srgbClr val="E9D8F0"/>
+          </a:solidFill>
+          <a:ln w="6350">
+            <a:solidFill>
+              <a:srgbClr val="CC0066"/>
+            </a:solidFill>
+          </a:ln>
+          <a:effectLst/>
+        </p:spPr>
+        <p:style>
+          <a:lnRef idx="1">
+            <a:schemeClr val="accent1"/>
+          </a:lnRef>
+          <a:fillRef idx="3">
+            <a:schemeClr val="accent1"/>
+          </a:fillRef>
+          <a:effectRef idx="2">
+            <a:schemeClr val="accent1"/>
+          </a:effectRef>
+          <a:fontRef idx="minor">
+            <a:schemeClr val="lt1"/>
+          </a:fontRef>
+        </p:style>
+        <p:txBody>
+          <a:bodyPr lIns="18288" rIns="18288" rtlCol="0" anchor="ctr"/>
+          <a:lstStyle/>
+          <a:p>
+            <a:pPr algn="ctr"/>
+            <a:r>
+              <a:rPr sz="1100" b="1">
+                <a:solidFill>
+                  <a:srgbClr val="663399"/>
+                </a:solidFill>
+                <a:latin typeface="Consolas"/>
+              </a:rPr>
+              <a:t>Compile</a:t>
+            </a:r>
+          </a:p>
+        </p:txBody>
+      </p:sp>
+      <p:sp>
+        <p:nvSpPr>
+          <p:cNvPr id="11" name="TextBox 10"/>
+          <p:cNvSpPr txBox="1"/>
+          <p:nvPr/>
+        </p:nvSpPr>
+        <p:spPr>
+          <a:xfrm>
+            <a:off x="7264907" y="2788920"/>
+            <a:ext cx="2249424" cy="320040"/>
+          </a:xfrm>
+          <a:prstGeom prst="rect">
+            <a:avLst/>
+          </a:prstGeom>
+          <a:noFill/>
+        </p:spPr>
+        <p:txBody>
+          <a:bodyPr wrap="square" lIns="45720" rIns="45720" anchor="t">
+            <a:spAutoFit/>
+          </a:bodyPr>
+          <a:lstStyle/>
+          <a:p>
+            <a:pPr algn="ctr"/>
+            <a:r>
+              <a:rPr sz="900" b="0" i="0">
+                <a:solidFill>
+                  <a:srgbClr val="666666"/>
+                </a:solidFill>
+                <a:latin typeface="Calibri"/>
+              </a:rPr>
+              <a:t>Actual build</a:t>
+            </a:r>
+          </a:p>
+        </p:txBody>
+      </p:sp>
+      <p:sp>
+        <p:nvSpPr>
+          <p:cNvPr id="12" name="Rounded Rectangle 11"/>
+          <p:cNvSpPr/>
+          <p:nvPr/>
+        </p:nvSpPr>
+        <p:spPr>
+          <a:xfrm>
+            <a:off x="9560051" y="2103120"/>
+            <a:ext cx="2249424" cy="640080"/>
+          </a:xfrm>
+          <a:prstGeom prst="roundRect">
+            <a:avLst/>
+          </a:prstGeom>
+          <a:solidFill>
+            <a:srgbClr val="E9D8F0"/>
+          </a:solidFill>
+          <a:ln w="6350">
+            <a:solidFill>
+              <a:srgbClr val="CC0066"/>
+            </a:solidFill>
+          </a:ln>
+          <a:effectLst/>
+        </p:spPr>
+        <p:style>
+          <a:lnRef idx="1">
+            <a:schemeClr val="accent1"/>
+          </a:lnRef>
+          <a:fillRef idx="3">
+            <a:schemeClr val="accent1"/>
+          </a:fillRef>
+          <a:effectRef idx="2">
+            <a:schemeClr val="accent1"/>
+          </a:effectRef>
+          <a:fontRef idx="minor">
+            <a:schemeClr val="lt1"/>
+          </a:fontRef>
+        </p:style>
+        <p:txBody>
+          <a:bodyPr lIns="18288" rIns="18288" rtlCol="0" anchor="ctr"/>
+          <a:lstStyle/>
+          <a:p>
+            <a:pPr algn="ctr"/>
+            <a:r>
+              <a:rPr sz="1100" b="1">
+                <a:solidFill>
+                  <a:srgbClr val="663399"/>
+                </a:solidFill>
+                <a:latin typeface="Consolas"/>
+              </a:rPr>
+              <a:t>Package</a:t>
+            </a:r>
+          </a:p>
+        </p:txBody>
+      </p:sp>
+      <p:sp>
+        <p:nvSpPr>
+          <p:cNvPr id="13" name="TextBox 12"/>
+          <p:cNvSpPr txBox="1"/>
+          <p:nvPr/>
+        </p:nvSpPr>
+        <p:spPr>
+          <a:xfrm>
+            <a:off x="9560051" y="2788920"/>
+            <a:ext cx="2249424" cy="320040"/>
+          </a:xfrm>
+          <a:prstGeom prst="rect">
+            <a:avLst/>
+          </a:prstGeom>
+          <a:noFill/>
+        </p:spPr>
+        <p:txBody>
+          <a:bodyPr wrap="square" lIns="45720" rIns="45720" anchor="t">
+            <a:spAutoFit/>
+          </a:bodyPr>
+          <a:lstStyle/>
+          <a:p>
+            <a:pPr algn="ctr"/>
+            <a:r>
+              <a:rPr sz="900" b="0" i="0">
+                <a:solidFill>
+                  <a:srgbClr val="666666"/>
+                </a:solidFill>
+                <a:latin typeface="Calibri"/>
+              </a:rPr>
+              <a:t>QA + packaging</a:t>
+            </a:r>
+          </a:p>
+        </p:txBody>
+      </p:sp>
+      <p:sp>
+        <p:nvSpPr>
+          <p:cNvPr id="14" name="TextBox 13"/>
+          <p:cNvSpPr txBox="1"/>
+          <p:nvPr/>
+        </p:nvSpPr>
+        <p:spPr>
+          <a:xfrm>
+            <a:off x="822960" y="3657600"/>
+            <a:ext cx="10515600" cy="1913344"/>
+          </a:xfrm>
+          <a:prstGeom prst="rect">
+            <a:avLst/>
+          </a:prstGeom>
+          <a:noFill/>
+        </p:spPr>
+        <p:txBody>
+          <a:bodyPr wrap="square" lIns="45720" rIns="45720">
+            <a:spAutoFit/>
+          </a:bodyPr>
+          <a:lstStyle/>
+          <a:p>
+            <a:pPr>
+              <a:spcAft>
+                <a:spcPts val="600"/>
+              </a:spcAft>
+            </a:pPr>
+            <a:r>
+              <a:rPr sz="2000" b="1" i="0">
+                <a:solidFill>
+                  <a:srgbClr val="CC0066"/>
+                </a:solidFill>
+                <a:latin typeface="Calibri"/>
+              </a:rPr>
+              <a:t>Frequency in real life</a:t>
+            </a:r>
+          </a:p>
+          <a:p>
+            <a:pPr>
+              <a:spcAft>
+                <a:spcPts val="400"/>
+              </a:spcAft>
+            </a:pPr>
+            <a:r>
+              <a:rPr sz="1600" b="0" i="0">
+                <a:solidFill>
+                  <a:srgbClr val="333333"/>
+                </a:solidFill>
+                <a:latin typeface="Calibri"/>
+              </a:rPr>
+              <a:t>• Fetch: very common — network, mirrors, moved URLs</a:t>
+            </a:r>
+          </a:p>
+          <a:p>
+            <a:pPr>
+              <a:spcAft>
+                <a:spcPts val="400"/>
+              </a:spcAft>
+            </a:pPr>
+            <a:r>
+              <a:rPr sz="1600" b="0" i="0">
+                <a:solidFill>
+                  <a:srgbClr val="333333"/>
+                </a:solidFill>
+                <a:latin typeface="Calibri"/>
+              </a:rPr>
+              <a:t>• Patch: common after kernel/lib version bumps</a:t>
+            </a:r>
+          </a:p>
+          <a:p>
+            <a:pPr>
+              <a:spcAft>
+                <a:spcPts val="400"/>
+              </a:spcAft>
+            </a:pPr>
+            <a:r>
+              <a:rPr sz="1600" b="0" i="0">
+                <a:solidFill>
+                  <a:srgbClr val="333333"/>
+                </a:solidFill>
+                <a:latin typeface="Calibri"/>
+              </a:rPr>
+              <a:t>• Configure: less common — usually upstream issue</a:t>
+            </a:r>
+          </a:p>
+          <a:p>
+            <a:pPr>
+              <a:spcAft>
+                <a:spcPts val="400"/>
+              </a:spcAft>
+            </a:pPr>
+            <a:r>
+              <a:rPr sz="1600" b="0" i="0">
+                <a:solidFill>
+                  <a:srgbClr val="333333"/>
+                </a:solidFill>
+                <a:latin typeface="Calibri"/>
+              </a:rPr>
+              <a:t>• Compile: common — toolchain or version skew</a:t>
+            </a:r>
+          </a:p>
+          <a:p>
+            <a:pPr>
+              <a:spcAft>
+                <a:spcPts val="400"/>
+              </a:spcAft>
+            </a:pPr>
+            <a:r>
+              <a:rPr sz="1600" b="0" i="0">
+                <a:solidFill>
+                  <a:srgbClr val="333333"/>
+                </a:solidFill>
+                <a:latin typeface="Calibri"/>
+              </a:rPr>
+              <a:t>• Package: very common — QA warnings about FILES, debug splits</a:t>
+            </a:r>
+          </a:p>
+        </p:txBody>
+      </p:sp>
+    </p:spTree>
+  </p:cSld>
+  <p:clrMapOvr>
+    <a:masterClrMapping/>
+  </p:clrMapOvr>
+</p:sld>
+</file>
+
+<file path=ppt/slides/slide4.xml><?xml version="1.0" encoding="utf-8"?>
+<p:sld xmlns:a="http://schemas.openxmlformats.org/drawingml/2006/main" xmlns:r="http://schemas.openxmlformats.org/officeDocument/2006/relationships" xmlns:p="http://schemas.openxmlformats.org/presentationml/2006/main">
+  <p:cSld>
+    <p:spTree>
+      <p:nvGrpSpPr>
+        <p:cNvPr id="1" name=""/>
+        <p:cNvGrpSpPr/>
+        <p:nvPr/>
+      </p:nvGrpSpPr>
+      <p:grpSpPr>
+        <a:xfrm>
+          <a:off x="0" y="0"/>
+          <a:ext cx="0" cy="0"/>
+          <a:chOff x="0" y="0"/>
+          <a:chExt cx="0" cy="0"/>
+        </a:xfrm>
+      </p:grpSpPr>
+      <p:sp>
+        <p:nvSpPr>
+          <p:cNvPr id="2" name="Title 1"/>
+          <p:cNvSpPr>
+            <a:spLocks noGrp="1"/>
+          </p:cNvSpPr>
+          <p:nvPr>
+            <p:ph type="title"/>
+          </p:nvPr>
+        </p:nvSpPr>
+        <p:spPr/>
+        <p:txBody>
+          <a:bodyPr/>
+          <a:lstStyle/>
+          <a:p>
+            <a:r>
+              <a:rPr sz="3200" b="1" dirty="0">
+                <a:latin typeface="Calibri"/>
+              </a:rPr>
+              <a:t>Reading Task Logs</a:t>
+            </a:r>
+          </a:p>
+        </p:txBody>
+      </p:sp>
+      <p:sp>
+        <p:nvSpPr>
+          <p:cNvPr id="3" name="TextBox 2"/>
+          <p:cNvSpPr txBox="1"/>
+          <p:nvPr/>
+        </p:nvSpPr>
+        <p:spPr>
+          <a:xfrm>
+            <a:off x="822960" y="1417320"/>
+            <a:ext cx="10515600" cy="365760"/>
+          </a:xfrm>
+          <a:prstGeom prst="rect">
+            <a:avLst/>
+          </a:prstGeom>
+          <a:noFill/>
+        </p:spPr>
+        <p:txBody>
+          <a:bodyPr wrap="square" lIns="45720" rIns="45720" anchor="t">
             <a:spAutoFit/>
           </a:bodyPr>
           <a:lstStyle/>
@@ -5294,6 +6198,7 @@
           <a:lstStyle/>
           <a:p>
             <a:pPr algn="ctr"/>
+            <a:endParaRPr/>
           </a:p>
         </p:txBody>
       </p:sp>
@@ -5338,6 +6243,7 @@
           <a:lstStyle/>
           <a:p>
             <a:pPr algn="ctr"/>
+            <a:endParaRPr/>
           </a:p>
         </p:txBody>
       </p:sp>
@@ -5350,7 +6256,7 @@
         <p:spPr>
           <a:xfrm>
             <a:off x="1005840" y="1874519"/>
-            <a:ext cx="10241280" cy="3931920"/>
+            <a:ext cx="10241280" cy="3323987"/>
           </a:xfrm>
           <a:prstGeom prst="rect">
             <a:avLst/>
@@ -5369,7 +6275,7 @@
               </a:spcAft>
             </a:pPr>
             <a:r>
-              <a:rPr sz="1100" i="1">
+              <a:rPr sz="1400" i="1">
                 <a:solidFill>
                   <a:srgbClr val="808080"/>
                 </a:solidFill>
@@ -5385,7 +6291,7 @@
               </a:spcAft>
             </a:pPr>
             <a:r>
-              <a:rPr sz="1100" i="1">
+              <a:rPr sz="1400" i="1">
                 <a:solidFill>
                   <a:srgbClr val="808080"/>
                 </a:solidFill>
@@ -5401,7 +6307,7 @@
               </a:spcAft>
             </a:pPr>
             <a:r>
-              <a:rPr sz="1100" i="1">
+              <a:rPr sz="1400" i="1">
                 <a:solidFill>
                   <a:srgbClr val="808080"/>
                 </a:solidFill>
@@ -5417,7 +6323,7 @@
               </a:spcAft>
             </a:pPr>
             <a:r>
-              <a:rPr sz="1100">
+              <a:rPr sz="1400">
                 <a:solidFill>
                   <a:srgbClr val="2D2D2D"/>
                 </a:solidFill>
@@ -5433,7 +6339,7 @@
               </a:spcAft>
             </a:pPr>
             <a:r>
-              <a:rPr sz="1100" i="1">
+              <a:rPr sz="1400" i="1">
                 <a:solidFill>
                   <a:srgbClr val="808080"/>
                 </a:solidFill>
@@ -5449,7 +6355,7 @@
               </a:spcAft>
             </a:pPr>
             <a:r>
-              <a:rPr sz="1100">
+              <a:rPr sz="1400">
                 <a:solidFill>
                   <a:srgbClr val="2D2D2D"/>
                 </a:solidFill>
@@ -5465,7 +6371,7 @@
               </a:spcAft>
             </a:pPr>
             <a:r>
-              <a:rPr sz="1100">
+              <a:rPr sz="1400">
                 <a:solidFill>
                   <a:srgbClr val="2D2D2D"/>
                 </a:solidFill>
@@ -5481,7 +6387,7 @@
               </a:spcAft>
             </a:pPr>
             <a:r>
-              <a:rPr sz="1100" i="1">
+              <a:rPr sz="1400" i="1">
                 <a:solidFill>
                   <a:srgbClr val="808080"/>
                 </a:solidFill>
@@ -5497,7 +6403,7 @@
               </a:spcAft>
             </a:pPr>
             <a:r>
-              <a:rPr sz="1100" i="1">
+              <a:rPr sz="1400" i="1">
                 <a:solidFill>
                   <a:srgbClr val="808080"/>
                 </a:solidFill>
@@ -5513,7 +6419,7 @@
               </a:spcAft>
             </a:pPr>
             <a:r>
-              <a:rPr sz="1100" i="1">
+              <a:rPr sz="1400" i="1">
                 <a:solidFill>
                   <a:srgbClr val="808080"/>
                 </a:solidFill>
@@ -5529,7 +6435,7 @@
               </a:spcAft>
             </a:pPr>
             <a:r>
-              <a:rPr sz="1100" i="1">
+              <a:rPr sz="1400" i="1">
                 <a:solidFill>
                   <a:srgbClr val="808080"/>
                 </a:solidFill>
@@ -5545,7 +6451,7 @@
               </a:spcAft>
             </a:pPr>
             <a:r>
-              <a:rPr sz="1100" i="1">
+              <a:rPr sz="1400" i="1">
                 <a:solidFill>
                   <a:srgbClr val="808080"/>
                 </a:solidFill>
@@ -5561,7 +6467,7 @@
               </a:spcAft>
             </a:pPr>
             <a:r>
-              <a:rPr sz="1100">
+              <a:rPr sz="1400">
                 <a:solidFill>
                   <a:srgbClr val="2D2D2D"/>
                 </a:solidFill>
@@ -5577,7 +6483,7 @@
               </a:spcAft>
             </a:pPr>
             <a:r>
-              <a:rPr sz="1100" i="1">
+              <a:rPr sz="1400" i="1">
                 <a:solidFill>
                   <a:srgbClr val="808080"/>
                 </a:solidFill>
@@ -5593,7 +6499,7 @@
               </a:spcAft>
             </a:pPr>
             <a:r>
-              <a:rPr sz="1100">
+              <a:rPr sz="1400">
                 <a:solidFill>
                   <a:srgbClr val="2D2D2D"/>
                 </a:solidFill>
@@ -5641,7 +6547,7 @@
           </a:fontRef>
         </p:style>
         <p:txBody>
-          <a:bodyPr rtlCol="0" anchor="ctr" lIns="228600" rIns="228600" wrap="square"/>
+          <a:bodyPr wrap="square" lIns="228600" rIns="228600" rtlCol="0" anchor="ctr"/>
           <a:lstStyle/>
           <a:p>
             <a:pPr algn="l"/>
@@ -5665,8 +6571,8 @@
 </p:sld>
 </file>
 
-<file path=ppt/slides/slide11.xml><?xml version="1.0" encoding="utf-8"?>
-<p:sld xmlns:a="http://schemas.openxmlformats.org/drawingml/2006/main" xmlns:p="http://schemas.openxmlformats.org/presentationml/2006/main" xmlns:r="http://schemas.openxmlformats.org/officeDocument/2006/relationships">
+<file path=ppt/slides/slide5.xml><?xml version="1.0" encoding="utf-8"?>
+<p:sld xmlns:a="http://schemas.openxmlformats.org/drawingml/2006/main" xmlns:r="http://schemas.openxmlformats.org/officeDocument/2006/relationships" xmlns:p="http://schemas.openxmlformats.org/presentationml/2006/main">
   <p:cSld>
     <p:spTree>
       <p:nvGrpSpPr>
@@ -5674,7 +6580,14 @@
         <p:cNvGrpSpPr/>
         <p:nvPr/>
       </p:nvGrpSpPr>
-      <p:grpSpPr/>
+      <p:grpSpPr>
+        <a:xfrm>
+          <a:off x="0" y="0"/>
+          <a:ext cx="0" cy="0"/>
+          <a:chOff x="0" y="0"/>
+          <a:chExt cx="0" cy="0"/>
+        </a:xfrm>
+      </p:grpSpPr>
       <p:sp>
         <p:nvSpPr>
           <p:cNvPr id="2" name="Title 1"/>
@@ -5691,10 +6604,7 @@
           <a:lstStyle/>
           <a:p>
             <a:r>
-              <a:rPr sz="3200" b="1">
-                <a:solidFill>
-                  <a:srgbClr val="CC0066"/>
-                </a:solidFill>
+              <a:rPr sz="3200" b="1" dirty="0">
                 <a:latin typeface="Calibri"/>
               </a:rPr>
               <a:t>Reproducing a Single Task</a:t>
@@ -5719,7 +6629,7 @@
           <a:noFill/>
         </p:spPr>
         <p:txBody>
-          <a:bodyPr wrap="square" anchor="t" lIns="45720" rIns="45720">
+          <a:bodyPr wrap="square" lIns="45720" rIns="45720" anchor="t">
             <a:spAutoFit/>
           </a:bodyPr>
           <a:lstStyle/>
@@ -5780,6 +6690,7 @@
           <a:lstStyle/>
           <a:p>
             <a:pPr algn="ctr"/>
+            <a:endParaRPr/>
           </a:p>
         </p:txBody>
       </p:sp>
@@ -5824,6 +6735,7 @@
           <a:lstStyle/>
           <a:p>
             <a:pPr algn="ctr"/>
+            <a:endParaRPr/>
           </a:p>
         </p:txBody>
       </p:sp>
@@ -5836,7 +6748,7 @@
         <p:spPr>
           <a:xfrm>
             <a:off x="1005840" y="1874519"/>
-            <a:ext cx="10241280" cy="4389120"/>
+            <a:ext cx="10241280" cy="4185761"/>
           </a:xfrm>
           <a:prstGeom prst="rect">
             <a:avLst/>
@@ -5855,7 +6767,7 @@
               </a:spcAft>
             </a:pPr>
             <a:r>
-              <a:rPr sz="1100" i="1">
+              <a:rPr sz="1400" i="1">
                 <a:solidFill>
                   <a:srgbClr val="808080"/>
                 </a:solidFill>
@@ -5871,7 +6783,7 @@
               </a:spcAft>
             </a:pPr>
             <a:r>
-              <a:rPr sz="1100">
+              <a:rPr sz="1400">
                 <a:solidFill>
                   <a:srgbClr val="2D2D2D"/>
                 </a:solidFill>
@@ -5887,7 +6799,7 @@
               </a:spcAft>
             </a:pPr>
             <a:r>
-              <a:rPr sz="1100">
+              <a:rPr sz="1400">
                 <a:solidFill>
                   <a:srgbClr val="2D2D2D"/>
                 </a:solidFill>
@@ -5903,7 +6815,7 @@
               </a:spcAft>
             </a:pPr>
             <a:r>
-              <a:rPr sz="1100" i="1">
+              <a:rPr sz="1400" i="1">
                 <a:solidFill>
                   <a:srgbClr val="808080"/>
                 </a:solidFill>
@@ -5919,7 +6831,7 @@
               </a:spcAft>
             </a:pPr>
             <a:r>
-              <a:rPr sz="1100">
+              <a:rPr sz="1400">
                 <a:solidFill>
                   <a:srgbClr val="2D2D2D"/>
                 </a:solidFill>
@@ -5935,7 +6847,7 @@
               </a:spcAft>
             </a:pPr>
             <a:r>
-              <a:rPr sz="1100">
+              <a:rPr sz="1400">
                 <a:solidFill>
                   <a:srgbClr val="2D2D2D"/>
                 </a:solidFill>
@@ -5951,7 +6863,7 @@
               </a:spcAft>
             </a:pPr>
             <a:r>
-              <a:rPr sz="1100" i="1">
+              <a:rPr sz="1400" i="1">
                 <a:solidFill>
                   <a:srgbClr val="808080"/>
                 </a:solidFill>
@@ -5967,7 +6879,7 @@
               </a:spcAft>
             </a:pPr>
             <a:r>
-              <a:rPr sz="1100">
+              <a:rPr sz="1400">
                 <a:solidFill>
                   <a:srgbClr val="2D2D2D"/>
                 </a:solidFill>
@@ -5983,7 +6895,7 @@
               </a:spcAft>
             </a:pPr>
             <a:r>
-              <a:rPr sz="1100" i="1">
+              <a:rPr sz="1400" i="1">
                 <a:solidFill>
                   <a:srgbClr val="808080"/>
                 </a:solidFill>
@@ -5999,7 +6911,7 @@
               </a:spcAft>
             </a:pPr>
             <a:r>
-              <a:rPr sz="1100" i="1">
+              <a:rPr sz="1400" i="1">
                 <a:solidFill>
                   <a:srgbClr val="808080"/>
                 </a:solidFill>
@@ -6015,7 +6927,7 @@
               </a:spcAft>
             </a:pPr>
             <a:r>
-              <a:rPr sz="1100" i="1">
+              <a:rPr sz="1400" i="1">
                 <a:solidFill>
                   <a:srgbClr val="808080"/>
                 </a:solidFill>
@@ -6031,7 +6943,7 @@
               </a:spcAft>
             </a:pPr>
             <a:r>
-              <a:rPr sz="1100" i="1">
+              <a:rPr sz="1400" i="1">
                 <a:solidFill>
                   <a:srgbClr val="808080"/>
                 </a:solidFill>
@@ -6047,7 +6959,7 @@
               </a:spcAft>
             </a:pPr>
             <a:r>
-              <a:rPr sz="1100">
+              <a:rPr sz="1400">
                 <a:solidFill>
                   <a:srgbClr val="2D2D2D"/>
                 </a:solidFill>
@@ -6063,7 +6975,7 @@
               </a:spcAft>
             </a:pPr>
             <a:r>
-              <a:rPr sz="1100" i="1">
+              <a:rPr sz="1400" i="1">
                 <a:solidFill>
                   <a:srgbClr val="808080"/>
                 </a:solidFill>
@@ -6079,7 +6991,7 @@
               </a:spcAft>
             </a:pPr>
             <a:r>
-              <a:rPr sz="1100">
+              <a:rPr sz="1400">
                 <a:solidFill>
                   <a:srgbClr val="2D2D2D"/>
                 </a:solidFill>
@@ -6095,7 +7007,7 @@
               </a:spcAft>
             </a:pPr>
             <a:r>
-              <a:rPr sz="1100">
+              <a:rPr sz="1400">
                 <a:solidFill>
                   <a:srgbClr val="2D2D2D"/>
                 </a:solidFill>
@@ -6111,7 +7023,7 @@
               </a:spcAft>
             </a:pPr>
             <a:r>
-              <a:rPr sz="1100" i="1">
+              <a:rPr sz="1400" i="1">
                 <a:solidFill>
                   <a:srgbClr val="808080"/>
                 </a:solidFill>
@@ -6127,7 +7039,7 @@
               </a:spcAft>
             </a:pPr>
             <a:r>
-              <a:rPr sz="1100">
+              <a:rPr sz="1400">
                 <a:solidFill>
                   <a:srgbClr val="2D2D2D"/>
                 </a:solidFill>
@@ -6143,7 +7055,7 @@
               </a:spcAft>
             </a:pPr>
             <a:r>
-              <a:rPr sz="1100">
+              <a:rPr sz="1400">
                 <a:solidFill>
                   <a:srgbClr val="2D2D2D"/>
                 </a:solidFill>
@@ -6162,8 +7074,8 @@
 </p:sld>
 </file>
 
-<file path=ppt/slides/slide12.xml><?xml version="1.0" encoding="utf-8"?>
-<p:sld xmlns:a="http://schemas.openxmlformats.org/drawingml/2006/main" xmlns:p="http://schemas.openxmlformats.org/presentationml/2006/main" xmlns:r="http://schemas.openxmlformats.org/officeDocument/2006/relationships">
+<file path=ppt/slides/slide6.xml><?xml version="1.0" encoding="utf-8"?>
+<p:sld xmlns:a="http://schemas.openxmlformats.org/drawingml/2006/main" xmlns:r="http://schemas.openxmlformats.org/officeDocument/2006/relationships" xmlns:p="http://schemas.openxmlformats.org/presentationml/2006/main">
   <p:cSld>
     <p:spTree>
       <p:nvGrpSpPr>
@@ -6171,7 +7083,14 @@
         <p:cNvGrpSpPr/>
         <p:nvPr/>
       </p:nvGrpSpPr>
-      <p:grpSpPr/>
+      <p:grpSpPr>
+        <a:xfrm>
+          <a:off x="0" y="0"/>
+          <a:ext cx="0" cy="0"/>
+          <a:chOff x="0" y="0"/>
+          <a:chExt cx="0" cy="0"/>
+        </a:xfrm>
+      </p:grpSpPr>
       <p:sp>
         <p:nvSpPr>
           <p:cNvPr id="2" name="Title 1"/>
@@ -6188,10 +7107,7 @@
           <a:lstStyle/>
           <a:p>
             <a:r>
-              <a:rPr sz="3200" b="1">
-                <a:solidFill>
-                  <a:srgbClr val="CC0066"/>
-                </a:solidFill>
+              <a:rPr sz="3200" b="1" dirty="0">
                 <a:latin typeface="Calibri"/>
               </a:rPr>
               <a:t>Inspecting WORKDIR</a:t>
@@ -6216,7 +7132,7 @@
           <a:noFill/>
         </p:spPr>
         <p:txBody>
-          <a:bodyPr wrap="square" anchor="t" lIns="45720" rIns="45720">
+          <a:bodyPr wrap="square" lIns="45720" rIns="45720" anchor="t">
             <a:spAutoFit/>
           </a:bodyPr>
           <a:lstStyle/>
@@ -6277,6 +7193,7 @@
           <a:lstStyle/>
           <a:p>
             <a:pPr algn="ctr"/>
+            <a:endParaRPr/>
           </a:p>
         </p:txBody>
       </p:sp>
@@ -6321,6 +7238,7 @@
           <a:lstStyle/>
           <a:p>
             <a:pPr algn="ctr"/>
+            <a:endParaRPr/>
           </a:p>
         </p:txBody>
       </p:sp>
@@ -6333,7 +7251,7 @@
         <p:spPr>
           <a:xfrm>
             <a:off x="1005840" y="1874519"/>
-            <a:ext cx="10241280" cy="4389120"/>
+            <a:ext cx="10241280" cy="4524315"/>
           </a:xfrm>
           <a:prstGeom prst="rect">
             <a:avLst/>
@@ -6352,7 +7270,7 @@
               </a:spcAft>
             </a:pPr>
             <a:r>
-              <a:rPr sz="1100" i="1">
+              <a:rPr sz="1600" i="1">
                 <a:solidFill>
                   <a:srgbClr val="808080"/>
                 </a:solidFill>
@@ -6368,7 +7286,7 @@
               </a:spcAft>
             </a:pPr>
             <a:r>
-              <a:rPr sz="1100">
+              <a:rPr sz="1600">
                 <a:solidFill>
                   <a:srgbClr val="2D2D2D"/>
                 </a:solidFill>
@@ -6384,7 +7302,7 @@
               </a:spcAft>
             </a:pPr>
             <a:r>
-              <a:rPr sz="1100">
+              <a:rPr sz="1600">
                 <a:solidFill>
                   <a:srgbClr val="2D2D2D"/>
                 </a:solidFill>
@@ -6400,7 +7318,7 @@
               </a:spcAft>
             </a:pPr>
             <a:r>
-              <a:rPr sz="1100">
+              <a:rPr sz="1600">
                 <a:solidFill>
                   <a:srgbClr val="2D2D2D"/>
                 </a:solidFill>
@@ -6416,7 +7334,7 @@
               </a:spcAft>
             </a:pPr>
             <a:r>
-              <a:rPr sz="1100">
+              <a:rPr sz="1600">
                 <a:solidFill>
                   <a:srgbClr val="2D2D2D"/>
                 </a:solidFill>
@@ -6432,7 +7350,7 @@
               </a:spcAft>
             </a:pPr>
             <a:r>
-              <a:rPr sz="1100">
+              <a:rPr sz="1600">
                 <a:solidFill>
                   <a:srgbClr val="2D2D2D"/>
                 </a:solidFill>
@@ -6448,7 +7366,7 @@
               </a:spcAft>
             </a:pPr>
             <a:r>
-              <a:rPr sz="1100">
+              <a:rPr sz="1600">
                 <a:solidFill>
                   <a:srgbClr val="2D2D2D"/>
                 </a:solidFill>
@@ -6464,7 +7382,7 @@
               </a:spcAft>
             </a:pPr>
             <a:r>
-              <a:rPr sz="1100">
+              <a:rPr sz="1600">
                 <a:solidFill>
                   <a:srgbClr val="2D2D2D"/>
                 </a:solidFill>
@@ -6480,7 +7398,7 @@
               </a:spcAft>
             </a:pPr>
             <a:r>
-              <a:rPr sz="1100">
+              <a:rPr sz="1600">
                 <a:solidFill>
                   <a:srgbClr val="2D2D2D"/>
                 </a:solidFill>
@@ -6496,7 +7414,7 @@
               </a:spcAft>
             </a:pPr>
             <a:r>
-              <a:rPr sz="1100">
+              <a:rPr sz="1600">
                 <a:solidFill>
                   <a:srgbClr val="2D2D2D"/>
                 </a:solidFill>
@@ -6512,7 +7430,7 @@
               </a:spcAft>
             </a:pPr>
             <a:r>
-              <a:rPr sz="1100">
+              <a:rPr sz="1600">
                 <a:solidFill>
                   <a:srgbClr val="2D2D2D"/>
                 </a:solidFill>
@@ -6528,7 +7446,7 @@
               </a:spcAft>
             </a:pPr>
             <a:r>
-              <a:rPr sz="1100">
+              <a:rPr sz="1600">
                 <a:solidFill>
                   <a:srgbClr val="2D2D2D"/>
                 </a:solidFill>
@@ -6544,7 +7462,7 @@
               </a:spcAft>
             </a:pPr>
             <a:r>
-              <a:rPr sz="1100">
+              <a:rPr sz="1600">
                 <a:solidFill>
                   <a:srgbClr val="2D2D2D"/>
                 </a:solidFill>
@@ -6560,7 +7478,7 @@
               </a:spcAft>
             </a:pPr>
             <a:r>
-              <a:rPr sz="1100">
+              <a:rPr sz="1600">
                 <a:solidFill>
                   <a:srgbClr val="2D2D2D"/>
                 </a:solidFill>
@@ -6576,7 +7494,7 @@
               </a:spcAft>
             </a:pPr>
             <a:r>
-              <a:rPr sz="1100" i="1">
+              <a:rPr sz="1600" i="1">
                 <a:solidFill>
                   <a:srgbClr val="808080"/>
                 </a:solidFill>
@@ -6592,7 +7510,7 @@
               </a:spcAft>
             </a:pPr>
             <a:r>
-              <a:rPr sz="1100" i="1">
+              <a:rPr sz="1600" i="1">
                 <a:solidFill>
                   <a:srgbClr val="808080"/>
                 </a:solidFill>
@@ -6608,7 +7526,7 @@
               </a:spcAft>
             </a:pPr>
             <a:r>
-              <a:rPr sz="1100" i="1">
+              <a:rPr sz="1600" i="1">
                 <a:solidFill>
                   <a:srgbClr val="808080"/>
                 </a:solidFill>
@@ -6624,7 +7542,7 @@
               </a:spcAft>
             </a:pPr>
             <a:r>
-              <a:rPr sz="1100" i="1">
+              <a:rPr sz="1600" i="1">
                 <a:solidFill>
                   <a:srgbClr val="808080"/>
                 </a:solidFill>
@@ -6643,8 +7561,8 @@
 </p:sld>
 </file>
 
-<file path=ppt/slides/slide13.xml><?xml version="1.0" encoding="utf-8"?>
-<p:sld xmlns:a="http://schemas.openxmlformats.org/drawingml/2006/main" xmlns:p="http://schemas.openxmlformats.org/presentationml/2006/main" xmlns:r="http://schemas.openxmlformats.org/officeDocument/2006/relationships">
+<file path=ppt/slides/slide7.xml><?xml version="1.0" encoding="utf-8"?>
+<p:sld xmlns:a="http://schemas.openxmlformats.org/drawingml/2006/main" xmlns:r="http://schemas.openxmlformats.org/officeDocument/2006/relationships" xmlns:p="http://schemas.openxmlformats.org/presentationml/2006/main">
   <p:cSld>
     <p:spTree>
       <p:nvGrpSpPr>
@@ -6652,7 +7570,14 @@
         <p:cNvGrpSpPr/>
         <p:nvPr/>
       </p:nvGrpSpPr>
-      <p:grpSpPr/>
+      <p:grpSpPr>
+        <a:xfrm>
+          <a:off x="0" y="0"/>
+          <a:ext cx="0" cy="0"/>
+          <a:chOff x="0" y="0"/>
+          <a:chExt cx="0" cy="0"/>
+        </a:xfrm>
+      </p:grpSpPr>
       <p:sp>
         <p:nvSpPr>
           <p:cNvPr id="2" name="Title 1"/>
@@ -6669,10 +7594,7 @@
           <a:lstStyle/>
           <a:p>
             <a:r>
-              <a:rPr sz="3200" b="1">
-                <a:solidFill>
-                  <a:srgbClr val="CC0066"/>
-                </a:solidFill>
+              <a:rPr sz="3200" b="1" dirty="0">
                 <a:latin typeface="Calibri"/>
               </a:rPr>
               <a:t>Patch Workflows</a:t>
@@ -6697,7 +7619,7 @@
           <a:noFill/>
         </p:spPr>
         <p:txBody>
-          <a:bodyPr wrap="square" anchor="t" lIns="45720" rIns="45720">
+          <a:bodyPr wrap="square" lIns="45720" rIns="45720" anchor="t">
             <a:spAutoFit/>
           </a:bodyPr>
           <a:lstStyle/>
@@ -6922,8 +7844,8 @@
 </p:sld>
 </file>
 
-<file path=ppt/slides/slide14.xml><?xml version="1.0" encoding="utf-8"?>
-<p:sld xmlns:a="http://schemas.openxmlformats.org/drawingml/2006/main" xmlns:p="http://schemas.openxmlformats.org/presentationml/2006/main" xmlns:r="http://schemas.openxmlformats.org/officeDocument/2006/relationships">
+<file path=ppt/slides/slide8.xml><?xml version="1.0" encoding="utf-8"?>
+<p:sld xmlns:a="http://schemas.openxmlformats.org/drawingml/2006/main" xmlns:r="http://schemas.openxmlformats.org/officeDocument/2006/relationships" xmlns:p="http://schemas.openxmlformats.org/presentationml/2006/main">
   <p:cSld>
     <p:spTree>
       <p:nvGrpSpPr>
@@ -6931,7 +7853,14 @@
         <p:cNvGrpSpPr/>
         <p:nvPr/>
       </p:nvGrpSpPr>
-      <p:grpSpPr/>
+      <p:grpSpPr>
+        <a:xfrm>
+          <a:off x="0" y="0"/>
+          <a:ext cx="0" cy="0"/>
+          <a:chOff x="0" y="0"/>
+          <a:chExt cx="0" cy="0"/>
+        </a:xfrm>
+      </p:grpSpPr>
       <p:sp>
         <p:nvSpPr>
           <p:cNvPr id="2" name="Title 1"/>
@@ -6948,10 +7877,7 @@
           <a:lstStyle/>
           <a:p>
             <a:r>
-              <a:rPr sz="3200" b="1">
-                <a:solidFill>
-                  <a:srgbClr val="CC0066"/>
-                </a:solidFill>
+              <a:rPr sz="3200" b="1" dirty="0">
                 <a:latin typeface="Calibri"/>
               </a:rPr>
               <a:t>When to Clean, When to Retry</a:t>
@@ -6976,7 +7902,7 @@
           <a:noFill/>
         </p:spPr>
         <p:txBody>
-          <a:bodyPr wrap="square" anchor="t" lIns="45720" rIns="45720">
+          <a:bodyPr wrap="square" lIns="45720" rIns="45720" anchor="t">
             <a:spAutoFit/>
           </a:bodyPr>
           <a:lstStyle/>
@@ -7037,6 +7963,7 @@
           <a:lstStyle/>
           <a:p>
             <a:pPr algn="ctr"/>
+            <a:endParaRPr/>
           </a:p>
         </p:txBody>
       </p:sp>
@@ -7057,7 +7984,7 @@
           <a:noFill/>
         </p:spPr>
         <p:txBody>
-          <a:bodyPr wrap="square" anchor="t" lIns="45720" rIns="45720">
+          <a:bodyPr wrap="square" lIns="45720" rIns="45720" anchor="t">
             <a:spAutoFit/>
           </a:bodyPr>
           <a:lstStyle/>
@@ -7084,7 +8011,7 @@
         <p:spPr>
           <a:xfrm>
             <a:off x="960120" y="2468880"/>
-            <a:ext cx="4937760" cy="3337560"/>
+            <a:ext cx="4937760" cy="1754326"/>
           </a:xfrm>
           <a:prstGeom prst="rect">
             <a:avLst/>
@@ -7103,7 +8030,7 @@
               </a:spcAft>
             </a:pPr>
             <a:r>
-              <a:rPr sz="1300" b="1" i="0">
+              <a:rPr b="1" i="0">
                 <a:solidFill>
                   <a:srgbClr val="CC0066"/>
                 </a:solidFill>
@@ -7119,7 +8046,7 @@
               </a:spcAft>
             </a:pPr>
             <a:r>
-              <a:rPr sz="1200" b="0" i="0">
+              <a:rPr b="0" i="0">
                 <a:solidFill>
                   <a:srgbClr val="333333"/>
                 </a:solidFill>
@@ -7135,7 +8062,7 @@
               </a:spcAft>
             </a:pPr>
             <a:r>
-              <a:rPr sz="1300" b="1" i="0">
+              <a:rPr b="1" i="0">
                 <a:solidFill>
                   <a:srgbClr val="CC0066"/>
                 </a:solidFill>
@@ -7151,7 +8078,7 @@
               </a:spcAft>
             </a:pPr>
             <a:r>
-              <a:rPr sz="1200" b="0" i="0">
+              <a:rPr b="0" i="0">
                 <a:solidFill>
                   <a:srgbClr val="333333"/>
                 </a:solidFill>
@@ -7167,7 +8094,7 @@
               </a:spcAft>
             </a:pPr>
             <a:r>
-              <a:rPr sz="1100" b="0" i="1">
+              <a:rPr sz="1600" b="0" i="1">
                 <a:solidFill>
                   <a:srgbClr val="333333"/>
                 </a:solidFill>
@@ -7221,6 +8148,7 @@
           <a:lstStyle/>
           <a:p>
             <a:pPr algn="ctr"/>
+            <a:endParaRPr/>
           </a:p>
         </p:txBody>
       </p:sp>
@@ -7241,7 +8169,7 @@
           <a:noFill/>
         </p:spPr>
         <p:txBody>
-          <a:bodyPr wrap="square" anchor="t" lIns="45720" rIns="45720">
+          <a:bodyPr wrap="square" lIns="45720" rIns="45720" anchor="t">
             <a:spAutoFit/>
           </a:bodyPr>
           <a:lstStyle/>
@@ -7268,7 +8196,7 @@
         <p:spPr>
           <a:xfrm>
             <a:off x="6400800" y="2468880"/>
-            <a:ext cx="4937760" cy="3337560"/>
+            <a:ext cx="4937760" cy="2359620"/>
           </a:xfrm>
           <a:prstGeom prst="rect">
             <a:avLst/>
@@ -7287,7 +8215,7 @@
               </a:spcAft>
             </a:pPr>
             <a:r>
-              <a:rPr sz="1300" b="1" i="0">
+              <a:rPr b="1" i="0">
                 <a:solidFill>
                   <a:srgbClr val="663399"/>
                 </a:solidFill>
@@ -7303,7 +8231,7 @@
               </a:spcAft>
             </a:pPr>
             <a:r>
-              <a:rPr sz="1200" b="0" i="0">
+              <a:rPr b="0" i="0">
                 <a:solidFill>
                   <a:srgbClr val="333333"/>
                 </a:solidFill>
@@ -7319,7 +8247,7 @@
               </a:spcAft>
             </a:pPr>
             <a:r>
-              <a:rPr sz="1300" b="1" i="0">
+              <a:rPr b="1" i="0">
                 <a:solidFill>
                   <a:srgbClr val="663399"/>
                 </a:solidFill>
@@ -7335,7 +8263,7 @@
               </a:spcAft>
             </a:pPr>
             <a:r>
-              <a:rPr sz="1200" b="0" i="0">
+              <a:rPr b="0" i="0">
                 <a:solidFill>
                   <a:srgbClr val="333333"/>
                 </a:solidFill>
@@ -7351,7 +8279,7 @@
               </a:spcAft>
             </a:pPr>
             <a:r>
-              <a:rPr sz="1200" b="0" i="0">
+              <a:rPr b="0" i="0">
                 <a:solidFill>
                   <a:srgbClr val="333333"/>
                 </a:solidFill>
@@ -7367,7 +8295,7 @@
               </a:spcAft>
             </a:pPr>
             <a:r>
-              <a:rPr sz="1100" b="0" i="1">
+              <a:rPr sz="1600" b="0" i="1">
                 <a:solidFill>
                   <a:srgbClr val="333333"/>
                 </a:solidFill>
@@ -7415,18 +8343,54 @@
           </a:fontRef>
         </p:style>
         <p:txBody>
-          <a:bodyPr rtlCol="0" anchor="ctr" lIns="228600" rIns="228600" wrap="square"/>
+          <a:bodyPr wrap="square" lIns="228600" rIns="228600" rtlCol="0" anchor="ctr"/>
           <a:lstStyle/>
           <a:p>
             <a:pPr algn="l"/>
             <a:r>
-              <a:rPr sz="1200" b="1">
+              <a:rPr sz="1200" b="1" dirty="0">
                 <a:solidFill>
                   <a:srgbClr val="663399"/>
                 </a:solidFill>
                 <a:latin typeface="Calibri"/>
               </a:rPr>
-              <a:t>Avoid 'rm -rf tmp' as a debug strategy — it works but throws away hours of cached work.</a:t>
+              <a:t>Avoid 'rm -rf </a:t>
+            </a:r>
+            <a:r>
+              <a:rPr sz="1200" b="1" dirty="0" err="1">
+                <a:solidFill>
+                  <a:srgbClr val="663399"/>
+                </a:solidFill>
+                <a:latin typeface="Calibri"/>
+              </a:rPr>
+              <a:t>tmp</a:t>
+            </a:r>
+            <a:r>
+              <a:rPr sz="1200" b="1" dirty="0">
+                <a:solidFill>
+                  <a:srgbClr val="663399"/>
+                </a:solidFill>
+                <a:latin typeface="Calibri"/>
+              </a:rPr>
+              <a:t>' as a debug strategy </a:t>
+            </a:r>
+            <a:r>
+              <a:rPr lang="en-IN" sz="1200" b="1" dirty="0">
+                <a:solidFill>
+                  <a:srgbClr val="663399"/>
+                </a:solidFill>
+                <a:latin typeface="Calibri"/>
+              </a:rPr>
+              <a:t>: </a:t>
+            </a:r>
+            <a:r>
+              <a:rPr sz="1200" b="1" dirty="0">
+                <a:solidFill>
+                  <a:srgbClr val="663399"/>
+                </a:solidFill>
+                <a:latin typeface="Calibri"/>
+              </a:rPr>
+              <a:t>it works but throws away hours of cached work.</a:t>
             </a:r>
           </a:p>
         </p:txBody>
@@ -7439,8 +8403,8 @@
 </p:sld>
 </file>
 
-<file path=ppt/slides/slide15.xml><?xml version="1.0" encoding="utf-8"?>
-<p:sld xmlns:a="http://schemas.openxmlformats.org/drawingml/2006/main" xmlns:p="http://schemas.openxmlformats.org/presentationml/2006/main" xmlns:r="http://schemas.openxmlformats.org/officeDocument/2006/relationships">
+<file path=ppt/slides/slide9.xml><?xml version="1.0" encoding="utf-8"?>
+<p:sld xmlns:a="http://schemas.openxmlformats.org/drawingml/2006/main" xmlns:r="http://schemas.openxmlformats.org/officeDocument/2006/relationships" xmlns:p="http://schemas.openxmlformats.org/presentationml/2006/main">
   <p:cSld>
     <p:spTree>
       <p:nvGrpSpPr>
@@ -7448,7 +8412,14 @@
         <p:cNvGrpSpPr/>
         <p:nvPr/>
       </p:nvGrpSpPr>
-      <p:grpSpPr/>
+      <p:grpSpPr>
+        <a:xfrm>
+          <a:off x="0" y="0"/>
+          <a:ext cx="0" cy="0"/>
+          <a:chOff x="0" y="0"/>
+          <a:chExt cx="0" cy="0"/>
+        </a:xfrm>
+      </p:grpSpPr>
       <p:sp>
         <p:nvSpPr>
           <p:cNvPr id="2" name="Title 1"/>
@@ -7465,10 +8436,7 @@
           <a:lstStyle/>
           <a:p>
             <a:r>
-              <a:rPr sz="3200" b="1">
-                <a:solidFill>
-                  <a:srgbClr val="663399"/>
-                </a:solidFill>
+              <a:rPr sz="3200" b="1" dirty="0">
                 <a:latin typeface="Calibri"/>
               </a:rPr>
               <a:t>Session Summary</a:t>
@@ -7493,7 +8461,7 @@
           <a:noFill/>
         </p:spPr>
         <p:txBody>
-          <a:bodyPr wrap="square" anchor="t" lIns="45720" rIns="45720">
+          <a:bodyPr wrap="square" lIns="45720" rIns="45720" anchor="t">
             <a:spAutoFit/>
           </a:bodyPr>
           <a:lstStyle/>
@@ -7548,7 +8516,7 @@
           </a:fontRef>
         </p:style>
         <p:txBody>
-          <a:bodyPr rtlCol="0" anchor="ctr" lIns="0" rIns="0"/>
+          <a:bodyPr lIns="0" rIns="0" rtlCol="0" anchor="ctr"/>
           <a:lstStyle/>
           <a:p>
             <a:pPr algn="ctr"/>
@@ -7581,7 +8549,7 @@
           <a:noFill/>
         </p:spPr>
         <p:txBody>
-          <a:bodyPr wrap="square" anchor="t" lIns="45720" rIns="45720">
+          <a:bodyPr wrap="square" lIns="45720" rIns="45720" anchor="t">
             <a:spAutoFit/>
           </a:bodyPr>
           <a:lstStyle/>
@@ -7616,7 +8584,7 @@
           <a:noFill/>
         </p:spPr>
         <p:txBody>
-          <a:bodyPr wrap="square" anchor="t" lIns="45720" rIns="45720">
+          <a:bodyPr wrap="square" lIns="45720" rIns="45720" anchor="t">
             <a:spAutoFit/>
           </a:bodyPr>
           <a:lstStyle/>
@@ -7671,7 +8639,7 @@
           </a:fontRef>
         </p:style>
         <p:txBody>
-          <a:bodyPr rtlCol="0" anchor="ctr" lIns="0" rIns="0"/>
+          <a:bodyPr lIns="0" rIns="0" rtlCol="0" anchor="ctr"/>
           <a:lstStyle/>
           <a:p>
             <a:pPr algn="ctr"/>
@@ -7704,7 +8672,7 @@
           <a:noFill/>
         </p:spPr>
         <p:txBody>
-          <a:bodyPr wrap="square" anchor="t" lIns="45720" rIns="45720">
+          <a:bodyPr wrap="square" lIns="45720" rIns="45720" anchor="t">
             <a:spAutoFit/>
           </a:bodyPr>
           <a:lstStyle/>
@@ -7739,7 +8707,7 @@
           <a:noFill/>
         </p:spPr>
         <p:txBody>
-          <a:bodyPr wrap="square" anchor="t" lIns="45720" rIns="45720">
+          <a:bodyPr wrap="square" lIns="45720" rIns="45720" anchor="t">
             <a:spAutoFit/>
           </a:bodyPr>
           <a:lstStyle/>
@@ -7794,7 +8762,7 @@
           </a:fontRef>
         </p:style>
         <p:txBody>
-          <a:bodyPr rtlCol="0" anchor="ctr" lIns="0" rIns="0"/>
+          <a:bodyPr lIns="0" rIns="0" rtlCol="0" anchor="ctr"/>
           <a:lstStyle/>
           <a:p>
             <a:pPr algn="ctr"/>
@@ -7827,7 +8795,7 @@
           <a:noFill/>
         </p:spPr>
         <p:txBody>
-          <a:bodyPr wrap="square" anchor="t" lIns="45720" rIns="45720">
+          <a:bodyPr wrap="square" lIns="45720" rIns="45720" anchor="t">
             <a:spAutoFit/>
           </a:bodyPr>
           <a:lstStyle/>
@@ -7862,7 +8830,7 @@
           <a:noFill/>
         </p:spPr>
         <p:txBody>
-          <a:bodyPr wrap="square" anchor="t" lIns="45720" rIns="45720">
+          <a:bodyPr wrap="square" lIns="45720" rIns="45720" anchor="t">
             <a:spAutoFit/>
           </a:bodyPr>
           <a:lstStyle/>
@@ -7917,7 +8885,7 @@
           </a:fontRef>
         </p:style>
         <p:txBody>
-          <a:bodyPr rtlCol="0" anchor="ctr" lIns="0" rIns="0"/>
+          <a:bodyPr lIns="0" rIns="0" rtlCol="0" anchor="ctr"/>
           <a:lstStyle/>
           <a:p>
             <a:pPr algn="ctr"/>
@@ -7950,7 +8918,7 @@
           <a:noFill/>
         </p:spPr>
         <p:txBody>
-          <a:bodyPr wrap="square" anchor="t" lIns="45720" rIns="45720">
+          <a:bodyPr wrap="square" lIns="45720" rIns="45720" anchor="t">
             <a:spAutoFit/>
           </a:bodyPr>
           <a:lstStyle/>
@@ -7985,7 +8953,7 @@
           <a:noFill/>
         </p:spPr>
         <p:txBody>
-          <a:bodyPr wrap="square" anchor="t" lIns="45720" rIns="45720">
+          <a:bodyPr wrap="square" lIns="45720" rIns="45720" anchor="t">
             <a:spAutoFit/>
           </a:bodyPr>
           <a:lstStyle/>
@@ -8040,7 +9008,7 @@
           </a:fontRef>
         </p:style>
         <p:txBody>
-          <a:bodyPr rtlCol="0" anchor="ctr" lIns="0" rIns="0"/>
+          <a:bodyPr lIns="0" rIns="0" rtlCol="0" anchor="ctr"/>
           <a:lstStyle/>
           <a:p>
             <a:pPr algn="ctr"/>
@@ -8073,7 +9041,7 @@
           <a:noFill/>
         </p:spPr>
         <p:txBody>
-          <a:bodyPr wrap="square" anchor="t" lIns="45720" rIns="45720">
+          <a:bodyPr wrap="square" lIns="45720" rIns="45720" anchor="t">
             <a:spAutoFit/>
           </a:bodyPr>
           <a:lstStyle/>
@@ -8108,7 +9076,7 @@
           <a:noFill/>
         </p:spPr>
         <p:txBody>
-          <a:bodyPr wrap="square" anchor="t" lIns="45720" rIns="45720">
+          <a:bodyPr wrap="square" lIns="45720" rIns="45720" anchor="t">
             <a:spAutoFit/>
           </a:bodyPr>
           <a:lstStyle/>
@@ -8163,12 +9131,12 @@
           </a:fontRef>
         </p:style>
         <p:txBody>
-          <a:bodyPr rtlCol="0" anchor="ctr" lIns="228600"/>
+          <a:bodyPr lIns="228600" rtlCol="0" anchor="ctr"/>
           <a:lstStyle/>
           <a:p>
             <a:pPr algn="ctr"/>
             <a:r>
-              <a:rPr sz="1400" b="1">
+              <a:rPr sz="1400" b="1" dirty="0">
                 <a:solidFill>
                   <a:srgbClr val="663399"/>
                 </a:solidFill>
@@ -8177,909 +9145,49 @@
               <a:t>Next session  →  </a:t>
             </a:r>
             <a:r>
-              <a:rPr sz="1400">
+              <a:rPr sz="1400" dirty="0">
                 <a:solidFill>
                   <a:srgbClr val="333333"/>
                 </a:solidFill>
                 <a:latin typeface="Calibri"/>
               </a:rPr>
-              <a:t>Performance &amp; Scalability (90 min) — sstate strategy at scale</a:t>
-            </a:r>
-          </a:p>
-        </p:txBody>
-      </p:sp>
-    </p:spTree>
-  </p:cSld>
-  <p:clrMapOvr>
-    <a:masterClrMapping/>
-  </p:clrMapOvr>
-</p:sld>
-</file>
-
-<file path=ppt/slides/slide7.xml><?xml version="1.0" encoding="utf-8"?>
-<p:sld xmlns:a="http://schemas.openxmlformats.org/drawingml/2006/main" xmlns:p="http://schemas.openxmlformats.org/presentationml/2006/main" xmlns:r="http://schemas.openxmlformats.org/officeDocument/2006/relationships">
-  <p:cSld>
-    <p:spTree>
-      <p:nvGrpSpPr>
-        <p:cNvPr id="1" name=""/>
-        <p:cNvGrpSpPr/>
-        <p:nvPr/>
-      </p:nvGrpSpPr>
-      <p:grpSpPr/>
-      <p:sp>
-        <p:nvSpPr>
-          <p:cNvPr id="2" name="Title 1"/>
-          <p:cNvSpPr>
-            <a:spLocks noGrp="1"/>
-          </p:cNvSpPr>
-          <p:nvPr>
-            <p:ph type="ctrTitle"/>
-          </p:nvPr>
-        </p:nvSpPr>
-        <p:spPr/>
-        <p:txBody>
-          <a:bodyPr/>
-          <a:lstStyle/>
-          <a:p>
-            <a:r>
-              <a:rPr sz="4400" b="1">
-                <a:solidFill>
-                  <a:srgbClr val="FFFFFF"/>
+              <a:t>Performance &amp; Scalability</a:t>
+            </a:r>
+            <a:r>
+              <a:rPr lang="en-IN" sz="1400" dirty="0">
+                <a:solidFill>
+                  <a:srgbClr val="333333"/>
                 </a:solidFill>
                 <a:latin typeface="Calibri"/>
               </a:rPr>
-              <a:t>Build Debugging</a:t>
-            </a:r>
-          </a:p>
-        </p:txBody>
-      </p:sp>
-      <p:sp>
-        <p:nvSpPr>
-          <p:cNvPr id="3" name="Subtitle 2"/>
-          <p:cNvSpPr>
-            <a:spLocks noGrp="1"/>
-          </p:cNvSpPr>
-          <p:nvPr>
-            <p:ph type="subTitle" idx="1"/>
-          </p:nvPr>
-        </p:nvSpPr>
-        <p:spPr/>
-        <p:txBody>
-          <a:bodyPr/>
-          <a:lstStyle/>
-          <a:p>
-            <a:r>
-              <a:rPr sz="2200" i="1">
-                <a:solidFill>
-                  <a:srgbClr val="FFFFFF"/>
+              <a:t>: s</a:t>
+            </a:r>
+            <a:r>
+              <a:rPr sz="1400" dirty="0">
+                <a:solidFill>
+                  <a:srgbClr val="333333"/>
                 </a:solidFill>
                 <a:latin typeface="Calibri"/>
               </a:rPr>
-              <a:t>Day 2 • Session 5 • 60 minutes</a:t>
-            </a:r>
-          </a:p>
-          <a:p>
-            <a:r>
-              <a:rPr sz="1800">
-                <a:solidFill>
-                  <a:srgbClr val="FFFFFF"/>
+              <a:t> </a:t>
+            </a:r>
+            <a:r>
+              <a:rPr sz="1400" dirty="0" err="1">
+                <a:solidFill>
+                  <a:srgbClr val="333333"/>
                 </a:solidFill>
                 <a:latin typeface="Calibri"/>
               </a:rPr>
-              <a:t>Diagnosing failures fast</a:t>
-            </a:r>
-          </a:p>
-        </p:txBody>
-      </p:sp>
-    </p:spTree>
-  </p:cSld>
-  <p:clrMapOvr>
-    <a:masterClrMapping/>
-  </p:clrMapOvr>
-</p:sld>
-</file>
-
-<file path=ppt/slides/slide8.xml><?xml version="1.0" encoding="utf-8"?>
-<p:sld xmlns:a="http://schemas.openxmlformats.org/drawingml/2006/main" xmlns:p="http://schemas.openxmlformats.org/presentationml/2006/main" xmlns:r="http://schemas.openxmlformats.org/officeDocument/2006/relationships">
-  <p:cSld>
-    <p:spTree>
-      <p:nvGrpSpPr>
-        <p:cNvPr id="1" name=""/>
-        <p:cNvGrpSpPr/>
-        <p:nvPr/>
-      </p:nvGrpSpPr>
-      <p:grpSpPr/>
-      <p:sp>
-        <p:nvSpPr>
-          <p:cNvPr id="2" name="Title 1"/>
-          <p:cNvSpPr>
-            <a:spLocks noGrp="1"/>
-          </p:cNvSpPr>
-          <p:nvPr>
-            <p:ph type="title"/>
-          </p:nvPr>
-        </p:nvSpPr>
-        <p:spPr/>
-        <p:txBody>
-          <a:bodyPr/>
-          <a:lstStyle/>
-          <a:p>
-            <a:r>
-              <a:rPr sz="3200" b="1">
-                <a:solidFill>
-                  <a:srgbClr val="CC0066"/>
+              <a:t>sstate</a:t>
+            </a:r>
+            <a:r>
+              <a:rPr sz="1400" dirty="0">
+                <a:solidFill>
+                  <a:srgbClr val="333333"/>
                 </a:solidFill>
                 <a:latin typeface="Calibri"/>
               </a:rPr>
-              <a:t>Session Agenda</a:t>
-            </a:r>
-          </a:p>
-        </p:txBody>
-      </p:sp>
-      <p:sp>
-        <p:nvSpPr>
-          <p:cNvPr id="3" name="TextBox 2"/>
-          <p:cNvSpPr txBox="1"/>
-          <p:nvPr/>
-        </p:nvSpPr>
-        <p:spPr>
-          <a:xfrm>
-            <a:off x="822960" y="1463040"/>
-            <a:ext cx="10515600" cy="5029200"/>
-          </a:xfrm>
-          <a:prstGeom prst="rect">
-            <a:avLst/>
-          </a:prstGeom>
-          <a:noFill/>
-        </p:spPr>
-        <p:txBody>
-          <a:bodyPr wrap="square" lIns="45720" rIns="45720">
-            <a:spAutoFit/>
-          </a:bodyPr>
-          <a:lstStyle/>
-          <a:p>
-            <a:pPr>
-              <a:spcAft>
-                <a:spcPts val="600"/>
-              </a:spcAft>
-            </a:pPr>
-            <a:r>
-              <a:rPr sz="2000" b="0" i="0">
-                <a:solidFill>
-                  <a:srgbClr val="333333"/>
-                </a:solidFill>
-                <a:latin typeface="Calibri"/>
-              </a:rPr>
-              <a:t>1.  The five places builds fail</a:t>
-            </a:r>
-          </a:p>
-          <a:p>
-            <a:pPr>
-              <a:spcAft>
-                <a:spcPts val="600"/>
-              </a:spcAft>
-            </a:pPr>
-            <a:r>
-              <a:rPr sz="2000" b="0" i="0">
-                <a:solidFill>
-                  <a:srgbClr val="333333"/>
-                </a:solidFill>
-                <a:latin typeface="Calibri"/>
-              </a:rPr>
-              <a:t>2.  Reading task logs</a:t>
-            </a:r>
-          </a:p>
-          <a:p>
-            <a:pPr>
-              <a:spcAft>
-                <a:spcPts val="600"/>
-              </a:spcAft>
-            </a:pPr>
-            <a:r>
-              <a:rPr sz="2000" b="0" i="0">
-                <a:solidFill>
-                  <a:srgbClr val="333333"/>
-                </a:solidFill>
-                <a:latin typeface="Calibri"/>
-              </a:rPr>
-              <a:t>3.  Reproducing a single task</a:t>
-            </a:r>
-          </a:p>
-          <a:p>
-            <a:pPr>
-              <a:spcAft>
-                <a:spcPts val="600"/>
-              </a:spcAft>
-            </a:pPr>
-            <a:r>
-              <a:rPr sz="2000" b="0" i="0">
-                <a:solidFill>
-                  <a:srgbClr val="333333"/>
-                </a:solidFill>
-                <a:latin typeface="Calibri"/>
-              </a:rPr>
-              <a:t>4.  Inspecting WORKDIR</a:t>
-            </a:r>
-          </a:p>
-          <a:p>
-            <a:pPr>
-              <a:spcAft>
-                <a:spcPts val="600"/>
-              </a:spcAft>
-            </a:pPr>
-            <a:r>
-              <a:rPr sz="2000" b="0" i="0">
-                <a:solidFill>
-                  <a:srgbClr val="333333"/>
-                </a:solidFill>
-                <a:latin typeface="Calibri"/>
-              </a:rPr>
-              <a:t>5.  Patch workflows that don't break on rebase</a:t>
-            </a:r>
-          </a:p>
-          <a:p>
-            <a:pPr>
-              <a:spcAft>
-                <a:spcPts val="600"/>
-              </a:spcAft>
-            </a:pPr>
-            <a:r>
-              <a:rPr sz="2000" b="0" i="0">
-                <a:solidFill>
-                  <a:srgbClr val="333333"/>
-                </a:solidFill>
-                <a:latin typeface="Calibri"/>
-              </a:rPr>
-              <a:t>6.  When to clean and when to retry</a:t>
-            </a:r>
-          </a:p>
-        </p:txBody>
-      </p:sp>
-    </p:spTree>
-  </p:cSld>
-  <p:clrMapOvr>
-    <a:masterClrMapping/>
-  </p:clrMapOvr>
-</p:sld>
-</file>
-
-<file path=ppt/slides/slide9.xml><?xml version="1.0" encoding="utf-8"?>
-<p:sld xmlns:a="http://schemas.openxmlformats.org/drawingml/2006/main" xmlns:p="http://schemas.openxmlformats.org/presentationml/2006/main" xmlns:r="http://schemas.openxmlformats.org/officeDocument/2006/relationships">
-  <p:cSld>
-    <p:spTree>
-      <p:nvGrpSpPr>
-        <p:cNvPr id="1" name=""/>
-        <p:cNvGrpSpPr/>
-        <p:nvPr/>
-      </p:nvGrpSpPr>
-      <p:grpSpPr/>
-      <p:sp>
-        <p:nvSpPr>
-          <p:cNvPr id="2" name="Title 1"/>
-          <p:cNvSpPr>
-            <a:spLocks noGrp="1"/>
-          </p:cNvSpPr>
-          <p:nvPr>
-            <p:ph type="title"/>
-          </p:nvPr>
-        </p:nvSpPr>
-        <p:spPr/>
-        <p:txBody>
-          <a:bodyPr/>
-          <a:lstStyle/>
-          <a:p>
-            <a:r>
-              <a:rPr sz="3200" b="1">
-                <a:solidFill>
-                  <a:srgbClr val="CC0066"/>
-                </a:solidFill>
-                <a:latin typeface="Calibri"/>
-              </a:rPr>
-              <a:t>Where Builds Fail</a:t>
-            </a:r>
-          </a:p>
-        </p:txBody>
-      </p:sp>
-      <p:sp>
-        <p:nvSpPr>
-          <p:cNvPr id="3" name="TextBox 2"/>
-          <p:cNvSpPr txBox="1"/>
-          <p:nvPr/>
-        </p:nvSpPr>
-        <p:spPr>
-          <a:xfrm>
-            <a:off x="822960" y="1417320"/>
-            <a:ext cx="10515600" cy="365760"/>
-          </a:xfrm>
-          <a:prstGeom prst="rect">
-            <a:avLst/>
-          </a:prstGeom>
-          <a:noFill/>
-        </p:spPr>
-        <p:txBody>
-          <a:bodyPr wrap="square" anchor="t" lIns="45720" rIns="45720">
-            <a:spAutoFit/>
-          </a:bodyPr>
-          <a:lstStyle/>
-          <a:p>
-            <a:pPr algn="l"/>
-            <a:r>
-              <a:rPr sz="1500" b="0" i="1">
-                <a:solidFill>
-                  <a:srgbClr val="666666"/>
-                </a:solidFill>
-                <a:latin typeface="Calibri"/>
-              </a:rPr>
-              <a:t>Five places, in roughly increasing complexity.</a:t>
-            </a:r>
-          </a:p>
-        </p:txBody>
-      </p:sp>
-      <p:sp>
-        <p:nvSpPr>
-          <p:cNvPr id="4" name="Rounded Rectangle 3"/>
-          <p:cNvSpPr/>
-          <p:nvPr/>
-        </p:nvSpPr>
-        <p:spPr>
-          <a:xfrm>
-            <a:off x="379476" y="2103120"/>
-            <a:ext cx="2249424" cy="640080"/>
-          </a:xfrm>
-          <a:prstGeom prst="roundRect">
-            <a:avLst/>
-          </a:prstGeom>
-          <a:solidFill>
-            <a:srgbClr val="FCE4EC"/>
-          </a:solidFill>
-          <a:ln w="6350">
-            <a:solidFill>
-              <a:srgbClr val="CC0066"/>
-            </a:solidFill>
-          </a:ln>
-          <a:effectLst/>
-        </p:spPr>
-        <p:style>
-          <a:lnRef idx="1">
-            <a:schemeClr val="accent1"/>
-          </a:lnRef>
-          <a:fillRef idx="3">
-            <a:schemeClr val="accent1"/>
-          </a:fillRef>
-          <a:effectRef idx="2">
-            <a:schemeClr val="accent1"/>
-          </a:effectRef>
-          <a:fontRef idx="minor">
-            <a:schemeClr val="lt1"/>
-          </a:fontRef>
-        </p:style>
-        <p:txBody>
-          <a:bodyPr rtlCol="0" anchor="ctr" lIns="18288" rIns="18288"/>
-          <a:lstStyle/>
-          <a:p>
-            <a:pPr algn="ctr"/>
-            <a:r>
-              <a:rPr sz="1100" b="1">
-                <a:solidFill>
-                  <a:srgbClr val="663399"/>
-                </a:solidFill>
-                <a:latin typeface="Consolas"/>
-              </a:rPr>
-              <a:t>Fetch</a:t>
-            </a:r>
-          </a:p>
-        </p:txBody>
-      </p:sp>
-      <p:sp>
-        <p:nvSpPr>
-          <p:cNvPr id="5" name="TextBox 4"/>
-          <p:cNvSpPr txBox="1"/>
-          <p:nvPr/>
-        </p:nvSpPr>
-        <p:spPr>
-          <a:xfrm>
-            <a:off x="379476" y="2788920"/>
-            <a:ext cx="2249424" cy="320040"/>
-          </a:xfrm>
-          <a:prstGeom prst="rect">
-            <a:avLst/>
-          </a:prstGeom>
-          <a:noFill/>
-        </p:spPr>
-        <p:txBody>
-          <a:bodyPr wrap="square" anchor="t" lIns="45720" rIns="45720">
-            <a:spAutoFit/>
-          </a:bodyPr>
-          <a:lstStyle/>
-          <a:p>
-            <a:pPr algn="ctr"/>
-            <a:r>
-              <a:rPr sz="900" b="0" i="0">
-                <a:solidFill>
-                  <a:srgbClr val="666666"/>
-                </a:solidFill>
-                <a:latin typeface="Calibri"/>
-              </a:rPr>
-              <a:t>Source download</a:t>
-            </a:r>
-          </a:p>
-        </p:txBody>
-      </p:sp>
-      <p:sp>
-        <p:nvSpPr>
-          <p:cNvPr id="6" name="Rounded Rectangle 5"/>
-          <p:cNvSpPr/>
-          <p:nvPr/>
-        </p:nvSpPr>
-        <p:spPr>
-          <a:xfrm>
-            <a:off x="2674620" y="2103120"/>
-            <a:ext cx="2249424" cy="640080"/>
-          </a:xfrm>
-          <a:prstGeom prst="roundRect">
-            <a:avLst/>
-          </a:prstGeom>
-          <a:solidFill>
-            <a:srgbClr val="FCE4EC"/>
-          </a:solidFill>
-          <a:ln w="6350">
-            <a:solidFill>
-              <a:srgbClr val="CC0066"/>
-            </a:solidFill>
-          </a:ln>
-          <a:effectLst/>
-        </p:spPr>
-        <p:style>
-          <a:lnRef idx="1">
-            <a:schemeClr val="accent1"/>
-          </a:lnRef>
-          <a:fillRef idx="3">
-            <a:schemeClr val="accent1"/>
-          </a:fillRef>
-          <a:effectRef idx="2">
-            <a:schemeClr val="accent1"/>
-          </a:effectRef>
-          <a:fontRef idx="minor">
-            <a:schemeClr val="lt1"/>
-          </a:fontRef>
-        </p:style>
-        <p:txBody>
-          <a:bodyPr rtlCol="0" anchor="ctr" lIns="18288" rIns="18288"/>
-          <a:lstStyle/>
-          <a:p>
-            <a:pPr algn="ctr"/>
-            <a:r>
-              <a:rPr sz="1100" b="1">
-                <a:solidFill>
-                  <a:srgbClr val="663399"/>
-                </a:solidFill>
-                <a:latin typeface="Consolas"/>
-              </a:rPr>
-              <a:t>Patch</a:t>
-            </a:r>
-          </a:p>
-        </p:txBody>
-      </p:sp>
-      <p:sp>
-        <p:nvSpPr>
-          <p:cNvPr id="7" name="TextBox 6"/>
-          <p:cNvSpPr txBox="1"/>
-          <p:nvPr/>
-        </p:nvSpPr>
-        <p:spPr>
-          <a:xfrm>
-            <a:off x="2674620" y="2788920"/>
-            <a:ext cx="2249424" cy="320040"/>
-          </a:xfrm>
-          <a:prstGeom prst="rect">
-            <a:avLst/>
-          </a:prstGeom>
-          <a:noFill/>
-        </p:spPr>
-        <p:txBody>
-          <a:bodyPr wrap="square" anchor="t" lIns="45720" rIns="45720">
-            <a:spAutoFit/>
-          </a:bodyPr>
-          <a:lstStyle/>
-          <a:p>
-            <a:pPr algn="ctr"/>
-            <a:r>
-              <a:rPr sz="900" b="0" i="0">
-                <a:solidFill>
-                  <a:srgbClr val="666666"/>
-                </a:solidFill>
-                <a:latin typeface="Calibri"/>
-              </a:rPr>
-              <a:t>Apply patches</a:t>
-            </a:r>
-          </a:p>
-        </p:txBody>
-      </p:sp>
-      <p:sp>
-        <p:nvSpPr>
-          <p:cNvPr id="8" name="Rounded Rectangle 7"/>
-          <p:cNvSpPr/>
-          <p:nvPr/>
-        </p:nvSpPr>
-        <p:spPr>
-          <a:xfrm>
-            <a:off x="4969764" y="2103120"/>
-            <a:ext cx="2249424" cy="640080"/>
-          </a:xfrm>
-          <a:prstGeom prst="roundRect">
-            <a:avLst/>
-          </a:prstGeom>
-          <a:solidFill>
-            <a:srgbClr val="E9D8F0"/>
-          </a:solidFill>
-          <a:ln w="6350">
-            <a:solidFill>
-              <a:srgbClr val="CC0066"/>
-            </a:solidFill>
-          </a:ln>
-          <a:effectLst/>
-        </p:spPr>
-        <p:style>
-          <a:lnRef idx="1">
-            <a:schemeClr val="accent1"/>
-          </a:lnRef>
-          <a:fillRef idx="3">
-            <a:schemeClr val="accent1"/>
-          </a:fillRef>
-          <a:effectRef idx="2">
-            <a:schemeClr val="accent1"/>
-          </a:effectRef>
-          <a:fontRef idx="minor">
-            <a:schemeClr val="lt1"/>
-          </a:fontRef>
-        </p:style>
-        <p:txBody>
-          <a:bodyPr rtlCol="0" anchor="ctr" lIns="18288" rIns="18288"/>
-          <a:lstStyle/>
-          <a:p>
-            <a:pPr algn="ctr"/>
-            <a:r>
-              <a:rPr sz="1100" b="1">
-                <a:solidFill>
-                  <a:srgbClr val="663399"/>
-                </a:solidFill>
-                <a:latin typeface="Consolas"/>
-              </a:rPr>
-              <a:t>Configure</a:t>
-            </a:r>
-          </a:p>
-        </p:txBody>
-      </p:sp>
-      <p:sp>
-        <p:nvSpPr>
-          <p:cNvPr id="9" name="TextBox 8"/>
-          <p:cNvSpPr txBox="1"/>
-          <p:nvPr/>
-        </p:nvSpPr>
-        <p:spPr>
-          <a:xfrm>
-            <a:off x="4969764" y="2788920"/>
-            <a:ext cx="2249424" cy="320040"/>
-          </a:xfrm>
-          <a:prstGeom prst="rect">
-            <a:avLst/>
-          </a:prstGeom>
-          <a:noFill/>
-        </p:spPr>
-        <p:txBody>
-          <a:bodyPr wrap="square" anchor="t" lIns="45720" rIns="45720">
-            <a:spAutoFit/>
-          </a:bodyPr>
-          <a:lstStyle/>
-          <a:p>
-            <a:pPr algn="ctr"/>
-            <a:r>
-              <a:rPr sz="900" b="0" i="0">
-                <a:solidFill>
-                  <a:srgbClr val="666666"/>
-                </a:solidFill>
-                <a:latin typeface="Calibri"/>
-              </a:rPr>
-              <a:t>autotools/cmake</a:t>
-            </a:r>
-          </a:p>
-        </p:txBody>
-      </p:sp>
-      <p:sp>
-        <p:nvSpPr>
-          <p:cNvPr id="10" name="Rounded Rectangle 9"/>
-          <p:cNvSpPr/>
-          <p:nvPr/>
-        </p:nvSpPr>
-        <p:spPr>
-          <a:xfrm>
-            <a:off x="7264907" y="2103120"/>
-            <a:ext cx="2249424" cy="640080"/>
-          </a:xfrm>
-          <a:prstGeom prst="roundRect">
-            <a:avLst/>
-          </a:prstGeom>
-          <a:solidFill>
-            <a:srgbClr val="E9D8F0"/>
-          </a:solidFill>
-          <a:ln w="6350">
-            <a:solidFill>
-              <a:srgbClr val="CC0066"/>
-            </a:solidFill>
-          </a:ln>
-          <a:effectLst/>
-        </p:spPr>
-        <p:style>
-          <a:lnRef idx="1">
-            <a:schemeClr val="accent1"/>
-          </a:lnRef>
-          <a:fillRef idx="3">
-            <a:schemeClr val="accent1"/>
-          </a:fillRef>
-          <a:effectRef idx="2">
-            <a:schemeClr val="accent1"/>
-          </a:effectRef>
-          <a:fontRef idx="minor">
-            <a:schemeClr val="lt1"/>
-          </a:fontRef>
-        </p:style>
-        <p:txBody>
-          <a:bodyPr rtlCol="0" anchor="ctr" lIns="18288" rIns="18288"/>
-          <a:lstStyle/>
-          <a:p>
-            <a:pPr algn="ctr"/>
-            <a:r>
-              <a:rPr sz="1100" b="1">
-                <a:solidFill>
-                  <a:srgbClr val="663399"/>
-                </a:solidFill>
-                <a:latin typeface="Consolas"/>
-              </a:rPr>
-              <a:t>Compile</a:t>
-            </a:r>
-          </a:p>
-        </p:txBody>
-      </p:sp>
-      <p:sp>
-        <p:nvSpPr>
-          <p:cNvPr id="11" name="TextBox 10"/>
-          <p:cNvSpPr txBox="1"/>
-          <p:nvPr/>
-        </p:nvSpPr>
-        <p:spPr>
-          <a:xfrm>
-            <a:off x="7264907" y="2788920"/>
-            <a:ext cx="2249424" cy="320040"/>
-          </a:xfrm>
-          <a:prstGeom prst="rect">
-            <a:avLst/>
-          </a:prstGeom>
-          <a:noFill/>
-        </p:spPr>
-        <p:txBody>
-          <a:bodyPr wrap="square" anchor="t" lIns="45720" rIns="45720">
-            <a:spAutoFit/>
-          </a:bodyPr>
-          <a:lstStyle/>
-          <a:p>
-            <a:pPr algn="ctr"/>
-            <a:r>
-              <a:rPr sz="900" b="0" i="0">
-                <a:solidFill>
-                  <a:srgbClr val="666666"/>
-                </a:solidFill>
-                <a:latin typeface="Calibri"/>
-              </a:rPr>
-              <a:t>Actual build</a:t>
-            </a:r>
-          </a:p>
-        </p:txBody>
-      </p:sp>
-      <p:sp>
-        <p:nvSpPr>
-          <p:cNvPr id="12" name="Rounded Rectangle 11"/>
-          <p:cNvSpPr/>
-          <p:nvPr/>
-        </p:nvSpPr>
-        <p:spPr>
-          <a:xfrm>
-            <a:off x="9560051" y="2103120"/>
-            <a:ext cx="2249424" cy="640080"/>
-          </a:xfrm>
-          <a:prstGeom prst="roundRect">
-            <a:avLst/>
-          </a:prstGeom>
-          <a:solidFill>
-            <a:srgbClr val="E9D8F0"/>
-          </a:solidFill>
-          <a:ln w="6350">
-            <a:solidFill>
-              <a:srgbClr val="CC0066"/>
-            </a:solidFill>
-          </a:ln>
-          <a:effectLst/>
-        </p:spPr>
-        <p:style>
-          <a:lnRef idx="1">
-            <a:schemeClr val="accent1"/>
-          </a:lnRef>
-          <a:fillRef idx="3">
-            <a:schemeClr val="accent1"/>
-          </a:fillRef>
-          <a:effectRef idx="2">
-            <a:schemeClr val="accent1"/>
-          </a:effectRef>
-          <a:fontRef idx="minor">
-            <a:schemeClr val="lt1"/>
-          </a:fontRef>
-        </p:style>
-        <p:txBody>
-          <a:bodyPr rtlCol="0" anchor="ctr" lIns="18288" rIns="18288"/>
-          <a:lstStyle/>
-          <a:p>
-            <a:pPr algn="ctr"/>
-            <a:r>
-              <a:rPr sz="1100" b="1">
-                <a:solidFill>
-                  <a:srgbClr val="663399"/>
-                </a:solidFill>
-                <a:latin typeface="Consolas"/>
-              </a:rPr>
-              <a:t>Package</a:t>
-            </a:r>
-          </a:p>
-        </p:txBody>
-      </p:sp>
-      <p:sp>
-        <p:nvSpPr>
-          <p:cNvPr id="13" name="TextBox 12"/>
-          <p:cNvSpPr txBox="1"/>
-          <p:nvPr/>
-        </p:nvSpPr>
-        <p:spPr>
-          <a:xfrm>
-            <a:off x="9560051" y="2788920"/>
-            <a:ext cx="2249424" cy="320040"/>
-          </a:xfrm>
-          <a:prstGeom prst="rect">
-            <a:avLst/>
-          </a:prstGeom>
-          <a:noFill/>
-        </p:spPr>
-        <p:txBody>
-          <a:bodyPr wrap="square" anchor="t" lIns="45720" rIns="45720">
-            <a:spAutoFit/>
-          </a:bodyPr>
-          <a:lstStyle/>
-          <a:p>
-            <a:pPr algn="ctr"/>
-            <a:r>
-              <a:rPr sz="900" b="0" i="0">
-                <a:solidFill>
-                  <a:srgbClr val="666666"/>
-                </a:solidFill>
-                <a:latin typeface="Calibri"/>
-              </a:rPr>
-              <a:t>QA + packaging</a:t>
-            </a:r>
-          </a:p>
-        </p:txBody>
-      </p:sp>
-      <p:sp>
-        <p:nvSpPr>
-          <p:cNvPr id="14" name="TextBox 13"/>
-          <p:cNvSpPr txBox="1"/>
-          <p:nvPr/>
-        </p:nvSpPr>
-        <p:spPr>
-          <a:xfrm>
-            <a:off x="822960" y="3657600"/>
-            <a:ext cx="10515600" cy="2286000"/>
-          </a:xfrm>
-          <a:prstGeom prst="rect">
-            <a:avLst/>
-          </a:prstGeom>
-          <a:noFill/>
-        </p:spPr>
-        <p:txBody>
-          <a:bodyPr wrap="square" lIns="45720" rIns="45720">
-            <a:spAutoFit/>
-          </a:bodyPr>
-          <a:lstStyle/>
-          <a:p>
-            <a:pPr>
-              <a:spcAft>
-                <a:spcPts val="600"/>
-              </a:spcAft>
-            </a:pPr>
-            <a:r>
-              <a:rPr sz="1600" b="1" i="0">
-                <a:solidFill>
-                  <a:srgbClr val="CC0066"/>
-                </a:solidFill>
-                <a:latin typeface="Calibri"/>
-              </a:rPr>
-              <a:t>Frequency in real life</a:t>
-            </a:r>
-          </a:p>
-          <a:p>
-            <a:pPr>
-              <a:spcAft>
-                <a:spcPts val="400"/>
-              </a:spcAft>
-            </a:pPr>
-            <a:r>
-              <a:rPr sz="1300" b="0" i="0">
-                <a:solidFill>
-                  <a:srgbClr val="333333"/>
-                </a:solidFill>
-                <a:latin typeface="Calibri"/>
-              </a:rPr>
-              <a:t>• Fetch: very common — network, mirrors, moved URLs</a:t>
-            </a:r>
-          </a:p>
-          <a:p>
-            <a:pPr>
-              <a:spcAft>
-                <a:spcPts val="400"/>
-              </a:spcAft>
-            </a:pPr>
-            <a:r>
-              <a:rPr sz="1300" b="0" i="0">
-                <a:solidFill>
-                  <a:srgbClr val="333333"/>
-                </a:solidFill>
-                <a:latin typeface="Calibri"/>
-              </a:rPr>
-              <a:t>• Patch: common after kernel/lib version bumps</a:t>
-            </a:r>
-          </a:p>
-          <a:p>
-            <a:pPr>
-              <a:spcAft>
-                <a:spcPts val="400"/>
-              </a:spcAft>
-            </a:pPr>
-            <a:r>
-              <a:rPr sz="1300" b="0" i="0">
-                <a:solidFill>
-                  <a:srgbClr val="333333"/>
-                </a:solidFill>
-                <a:latin typeface="Calibri"/>
-              </a:rPr>
-              <a:t>• Configure: less common — usually upstream issue</a:t>
-            </a:r>
-          </a:p>
-          <a:p>
-            <a:pPr>
-              <a:spcAft>
-                <a:spcPts val="400"/>
-              </a:spcAft>
-            </a:pPr>
-            <a:r>
-              <a:rPr sz="1300" b="0" i="0">
-                <a:solidFill>
-                  <a:srgbClr val="333333"/>
-                </a:solidFill>
-                <a:latin typeface="Calibri"/>
-              </a:rPr>
-              <a:t>• Compile: common — toolchain or version skew</a:t>
-            </a:r>
-          </a:p>
-          <a:p>
-            <a:pPr>
-              <a:spcAft>
-                <a:spcPts val="400"/>
-              </a:spcAft>
-            </a:pPr>
-            <a:r>
-              <a:rPr sz="1300" b="0" i="0">
-                <a:solidFill>
-                  <a:srgbClr val="333333"/>
-                </a:solidFill>
-                <a:latin typeface="Calibri"/>
-              </a:rPr>
-              <a:t>• Package: very common — QA warnings about FILES, debug splits</a:t>
+              <a:t> strategy at scale</a:t>
             </a:r>
           </a:p>
         </p:txBody>
